--- a/examples/repositories/sebastian-193/deck.pptx
+++ b/examples/repositories/sebastian-193/deck.pptx
@@ -1926,9 +1926,9 @@
                 <a:solidFill>
                   <a:srgbClr val="52677B"/>
                 </a:solidFill>
-                <a:latin typeface="Noto Sans CJK JP" pitchFamily="34" charset="0"/>
-                <a:ea typeface="Noto Sans CJK JP" pitchFamily="34" charset="-122"/>
-                <a:cs typeface="Noto Sans CJK JP" pitchFamily="34" charset="-120"/>
+                <a:latin typeface="BIZ UDPGothic" pitchFamily="34" charset="0"/>
+                <a:ea typeface="BIZ UDPGothic" pitchFamily="34" charset="-122"/>
+                <a:cs typeface="BIZ UDPGothic" pitchFamily="34" charset="-120"/>
               </a:rPr>
               <a:t>小さな道案内  /  研究計画</a:t>
             </a:r>
@@ -1965,9 +1965,9 @@
                 <a:solidFill>
                   <a:srgbClr val="024C98"/>
                 </a:solidFill>
-                <a:latin typeface="Noto Sans CJK JP" pitchFamily="34" charset="0"/>
-                <a:ea typeface="Noto Sans CJK JP" pitchFamily="34" charset="-122"/>
-                <a:cs typeface="Noto Sans CJK JP" pitchFamily="34" charset="-120"/>
+                <a:latin typeface="BIZ UDPGothic" pitchFamily="34" charset="0"/>
+                <a:ea typeface="BIZ UDPGothic" pitchFamily="34" charset="-122"/>
+                <a:cs typeface="BIZ UDPGothic" pitchFamily="34" charset="-120"/>
               </a:rPr>
               <a:t>01</a:t>
             </a:r>
@@ -2031,9 +2031,9 @@
                 <a:solidFill>
                   <a:srgbClr val="52677B"/>
                 </a:solidFill>
-                <a:latin typeface="Noto Sans CJK JP" pitchFamily="34" charset="0"/>
-                <a:ea typeface="Noto Sans CJK JP" pitchFamily="34" charset="-122"/>
-                <a:cs typeface="Noto Sans CJK JP" pitchFamily="34" charset="-120"/>
+                <a:latin typeface="BIZ UDPGothic" pitchFamily="34" charset="0"/>
+                <a:ea typeface="BIZ UDPGothic" pitchFamily="34" charset="-122"/>
+                <a:cs typeface="BIZ UDPGothic" pitchFamily="34" charset="-120"/>
               </a:rPr>
               <a:t>架空・未実施の研究提案</a:t>
             </a:r>
@@ -2050,7 +2050,7 @@
         <p:spPr>
           <a:xfrm>
             <a:off x="640080" y="1143000"/>
-            <a:ext cx="8046720" cy="2286000"/>
+            <a:ext cx="6766560" cy="2286000"/>
           </a:xfrm>
           <a:prstGeom prst="rect">
             <a:avLst/>
@@ -2070,9 +2070,9 @@
                 <a:solidFill>
                   <a:srgbClr val="024C98"/>
                 </a:solidFill>
-                <a:latin typeface="Noto Sans CJK JP" pitchFamily="34" charset="0"/>
-                <a:ea typeface="Noto Sans CJK JP" pitchFamily="34" charset="-122"/>
-                <a:cs typeface="Noto Sans CJK JP" pitchFamily="34" charset="-120"/>
+                <a:latin typeface="BIZ UDPGothic" pitchFamily="34" charset="0"/>
+                <a:ea typeface="BIZ UDPGothic" pitchFamily="34" charset="-122"/>
+                <a:cs typeface="BIZ UDPGothic" pitchFamily="34" charset="-120"/>
               </a:rPr>
               <a:t>小さな</a:t>
             </a:r>
@@ -2087,9 +2087,9 @@
                 <a:solidFill>
                   <a:srgbClr val="024C98"/>
                 </a:solidFill>
-                <a:latin typeface="Noto Sans CJK JP" pitchFamily="34" charset="0"/>
-                <a:ea typeface="Noto Sans CJK JP" pitchFamily="34" charset="-122"/>
-                <a:cs typeface="Noto Sans CJK JP" pitchFamily="34" charset="-120"/>
+                <a:latin typeface="BIZ UDPGothic" pitchFamily="34" charset="0"/>
+                <a:ea typeface="BIZ UDPGothic" pitchFamily="34" charset="-122"/>
+                <a:cs typeface="BIZ UDPGothic" pitchFamily="34" charset="-120"/>
               </a:rPr>
               <a:t>道案内</a:t>
             </a:r>
@@ -2126,9 +2126,9 @@
                 <a:solidFill>
                   <a:srgbClr val="102A43"/>
                 </a:solidFill>
-                <a:latin typeface="Noto Sans CJK JP" pitchFamily="34" charset="0"/>
-                <a:ea typeface="Noto Sans CJK JP" pitchFamily="34" charset="-122"/>
-                <a:cs typeface="Noto Sans CJK JP" pitchFamily="34" charset="-120"/>
+                <a:latin typeface="BIZ UDPGothic" pitchFamily="34" charset="0"/>
+                <a:ea typeface="BIZ UDPGothic" pitchFamily="34" charset="-122"/>
+                <a:cs typeface="BIZ UDPGothic" pitchFamily="34" charset="-120"/>
               </a:rPr>
               <a:t>公共空間サインの読みやすさを探る</a:t>
             </a:r>
@@ -2143,9 +2143,9 @@
                 <a:solidFill>
                   <a:srgbClr val="102A43"/>
                 </a:solidFill>
-                <a:latin typeface="Noto Sans CJK JP" pitchFamily="34" charset="0"/>
-                <a:ea typeface="Noto Sans CJK JP" pitchFamily="34" charset="-122"/>
-                <a:cs typeface="Noto Sans CJK JP" pitchFamily="34" charset="-120"/>
+                <a:latin typeface="BIZ UDPGothic" pitchFamily="34" charset="0"/>
+                <a:ea typeface="BIZ UDPGothic" pitchFamily="34" charset="-122"/>
+                <a:cs typeface="BIZ UDPGothic" pitchFamily="34" charset="-120"/>
               </a:rPr>
               <a:t>デザイン研究計画</a:t>
             </a:r>
@@ -2182,11 +2182,11 @@
                 <a:solidFill>
                   <a:srgbClr val="1D5EA7"/>
                 </a:solidFill>
-                <a:latin typeface="Noto Sans CJK JP" pitchFamily="34" charset="0"/>
-                <a:ea typeface="Noto Sans CJK JP" pitchFamily="34" charset="-122"/>
-                <a:cs typeface="Noto Sans CJK JP" pitchFamily="34" charset="-120"/>
-              </a:rPr>
-              <a:t>目的地より先に、迷いを減らす</a:t>
+                <a:latin typeface="BIZ UDPGothic" pitchFamily="34" charset="0"/>
+                <a:ea typeface="BIZ UDPGothic" pitchFamily="34" charset="-122"/>
+                <a:cs typeface="BIZ UDPGothic" pitchFamily="34" charset="-120"/>
+              </a:rPr>
+              <a:t>入口から受付までの案内表示を比較する</a:t>
             </a:r>
             <a:endParaRPr lang="en-US" sz="2300" dirty="0"/>
           </a:p>
@@ -2228,7 +2228,7 @@
         <p:spPr>
           <a:xfrm>
             <a:off x="8321040" y="3168650"/>
-            <a:ext cx="2606040" cy="63500"/>
+            <a:ext cx="1737360" cy="63500"/>
           </a:xfrm>
           <a:prstGeom prst="rect">
             <a:avLst/>
@@ -2254,7 +2254,7 @@
         </p:nvSpPr>
         <p:spPr>
           <a:xfrm rot="5400000">
-            <a:off x="10858500" y="3131820"/>
+            <a:off x="9989820" y="3131820"/>
             <a:ext cx="137160" cy="137160"/>
           </a:xfrm>
           <a:prstGeom prst="triangle">
@@ -2349,9 +2349,9 @@
                 <a:solidFill>
                   <a:srgbClr val="102A43"/>
                 </a:solidFill>
-                <a:latin typeface="Noto Sans CJK JP" pitchFamily="34" charset="0"/>
-                <a:ea typeface="Noto Sans CJK JP" pitchFamily="34" charset="-122"/>
-                <a:cs typeface="Noto Sans CJK JP" pitchFamily="34" charset="-120"/>
+                <a:latin typeface="BIZ UDPGothic" pitchFamily="34" charset="0"/>
+                <a:ea typeface="BIZ UDPGothic" pitchFamily="34" charset="-122"/>
+                <a:cs typeface="BIZ UDPGothic" pitchFamily="34" charset="-120"/>
               </a:rPr>
               <a:t>入口</a:t>
             </a:r>
@@ -2388,9 +2388,9 @@
                 <a:solidFill>
                   <a:srgbClr val="102A43"/>
                 </a:solidFill>
-                <a:latin typeface="Noto Sans CJK JP" pitchFamily="34" charset="0"/>
-                <a:ea typeface="Noto Sans CJK JP" pitchFamily="34" charset="-122"/>
-                <a:cs typeface="Noto Sans CJK JP" pitchFamily="34" charset="-120"/>
+                <a:latin typeface="BIZ UDPGothic" pitchFamily="34" charset="0"/>
+                <a:ea typeface="BIZ UDPGothic" pitchFamily="34" charset="-122"/>
+                <a:cs typeface="BIZ UDPGothic" pitchFamily="34" charset="-120"/>
               </a:rPr>
               <a:t>分岐</a:t>
             </a:r>
@@ -2406,7 +2406,7 @@
         </p:nvSpPr>
         <p:spPr>
           <a:xfrm>
-            <a:off x="10058400" y="3675888"/>
+            <a:off x="10058400" y="2948940"/>
             <a:ext cx="1234440" cy="502920"/>
           </a:xfrm>
           <a:prstGeom prst="rect">
@@ -2431,7 +2431,7 @@
         </p:nvSpPr>
         <p:spPr>
           <a:xfrm>
-            <a:off x="10213848" y="3767328"/>
+            <a:off x="10213848" y="3040380"/>
             <a:ext cx="914400" cy="274320"/>
           </a:xfrm>
           <a:prstGeom prst="rect">
@@ -2452,9 +2452,9 @@
                 <a:solidFill>
                   <a:srgbClr val="FFFFFF"/>
                 </a:solidFill>
-                <a:latin typeface="Noto Sans CJK JP" pitchFamily="34" charset="0"/>
-                <a:ea typeface="Noto Sans CJK JP" pitchFamily="34" charset="-122"/>
-                <a:cs typeface="Noto Sans CJK JP" pitchFamily="34" charset="-120"/>
+                <a:latin typeface="BIZ UDPGothic" pitchFamily="34" charset="0"/>
+                <a:ea typeface="BIZ UDPGothic" pitchFamily="34" charset="-122"/>
+                <a:cs typeface="BIZ UDPGothic" pitchFamily="34" charset="-120"/>
               </a:rPr>
               <a:t>受付</a:t>
             </a:r>
@@ -2523,9 +2523,9 @@
                 <a:solidFill>
                   <a:srgbClr val="52677B"/>
                 </a:solidFill>
-                <a:latin typeface="Noto Sans CJK JP" pitchFamily="34" charset="0"/>
-                <a:ea typeface="Noto Sans CJK JP" pitchFamily="34" charset="-122"/>
-                <a:cs typeface="Noto Sans CJK JP" pitchFamily="34" charset="-120"/>
+                <a:latin typeface="BIZ UDPGothic" pitchFamily="34" charset="0"/>
+                <a:ea typeface="BIZ UDPGothic" pitchFamily="34" charset="-122"/>
+                <a:cs typeface="BIZ UDPGothic" pitchFamily="34" charset="-120"/>
               </a:rPr>
               <a:t>小さな道案内  /  研究計画</a:t>
             </a:r>
@@ -2562,9 +2562,9 @@
                 <a:solidFill>
                   <a:srgbClr val="024C98"/>
                 </a:solidFill>
-                <a:latin typeface="Noto Sans CJK JP" pitchFamily="34" charset="0"/>
-                <a:ea typeface="Noto Sans CJK JP" pitchFamily="34" charset="-122"/>
-                <a:cs typeface="Noto Sans CJK JP" pitchFamily="34" charset="-120"/>
+                <a:latin typeface="BIZ UDPGothic" pitchFamily="34" charset="0"/>
+                <a:ea typeface="BIZ UDPGothic" pitchFamily="34" charset="-122"/>
+                <a:cs typeface="BIZ UDPGothic" pitchFamily="34" charset="-120"/>
               </a:rPr>
               <a:t>02</a:t>
             </a:r>
@@ -2601,11 +2601,11 @@
                 <a:solidFill>
                   <a:srgbClr val="024C98"/>
                 </a:solidFill>
-                <a:latin typeface="Noto Sans CJK JP" pitchFamily="34" charset="0"/>
-                <a:ea typeface="Noto Sans CJK JP" pitchFamily="34" charset="-122"/>
-                <a:cs typeface="Noto Sans CJK JP" pitchFamily="34" charset="-120"/>
-              </a:rPr>
-              <a:t>問いは「読めるか」だけではない</a:t>
+                <a:latin typeface="BIZ UDPGothic" pitchFamily="34" charset="0"/>
+                <a:ea typeface="BIZ UDPGothic" pitchFamily="34" charset="-122"/>
+                <a:cs typeface="BIZ UDPGothic" pitchFamily="34" charset="-120"/>
+              </a:rPr>
+              <a:t>サインの評価を三つの判断に分ける</a:t>
             </a:r>
             <a:endParaRPr lang="en-US" sz="3000" dirty="0"/>
           </a:p>
@@ -2667,9 +2667,9 @@
                 <a:solidFill>
                   <a:srgbClr val="52677B"/>
                 </a:solidFill>
-                <a:latin typeface="Noto Sans CJK JP" pitchFamily="34" charset="0"/>
-                <a:ea typeface="Noto Sans CJK JP" pitchFamily="34" charset="-122"/>
-                <a:cs typeface="Noto Sans CJK JP" pitchFamily="34" charset="-120"/>
+                <a:latin typeface="BIZ UDPGothic" pitchFamily="34" charset="0"/>
+                <a:ea typeface="BIZ UDPGothic" pitchFamily="34" charset="-122"/>
+                <a:cs typeface="BIZ UDPGothic" pitchFamily="34" charset="-120"/>
               </a:rPr>
               <a:t>架空・未実施の研究提案</a:t>
             </a:r>
@@ -2706,9 +2706,9 @@
                 <a:solidFill>
                   <a:srgbClr val="102A43"/>
                 </a:solidFill>
-                <a:latin typeface="Noto Sans CJK JP" pitchFamily="34" charset="0"/>
-                <a:ea typeface="Noto Sans CJK JP" pitchFamily="34" charset="-122"/>
-                <a:cs typeface="Noto Sans CJK JP" pitchFamily="34" charset="-120"/>
+                <a:latin typeface="BIZ UDPGothic" pitchFamily="34" charset="0"/>
+                <a:ea typeface="BIZ UDPGothic" pitchFamily="34" charset="-122"/>
+                <a:cs typeface="BIZ UDPGothic" pitchFamily="34" charset="-120"/>
               </a:rPr>
               <a:t>どの情報を、どの位置で、どの順序で示すと</a:t>
             </a:r>
@@ -2723,9 +2723,9 @@
                 <a:solidFill>
                   <a:srgbClr val="102A43"/>
                 </a:solidFill>
-                <a:latin typeface="Noto Sans CJK JP" pitchFamily="34" charset="0"/>
-                <a:ea typeface="Noto Sans CJK JP" pitchFamily="34" charset="-122"/>
-                <a:cs typeface="Noto Sans CJK JP" pitchFamily="34" charset="-120"/>
+                <a:latin typeface="BIZ UDPGothic" pitchFamily="34" charset="0"/>
+                <a:ea typeface="BIZ UDPGothic" pitchFamily="34" charset="-122"/>
+                <a:cs typeface="BIZ UDPGothic" pitchFamily="34" charset="-120"/>
               </a:rPr>
               <a:t>進路を選びやすいか。</a:t>
             </a:r>
@@ -2762,9 +2762,9 @@
                 <a:solidFill>
                   <a:srgbClr val="1D5EA7"/>
                 </a:solidFill>
-                <a:latin typeface="Noto Sans CJK JP" pitchFamily="34" charset="0"/>
-                <a:ea typeface="Noto Sans CJK JP" pitchFamily="34" charset="-122"/>
-                <a:cs typeface="Noto Sans CJK JP" pitchFamily="34" charset="-120"/>
+                <a:latin typeface="BIZ UDPGothic" pitchFamily="34" charset="0"/>
+                <a:ea typeface="BIZ UDPGothic" pitchFamily="34" charset="-122"/>
+                <a:cs typeface="BIZ UDPGothic" pitchFamily="34" charset="-120"/>
               </a:rPr>
               <a:t>01</a:t>
             </a:r>
@@ -2801,9 +2801,9 @@
                 <a:solidFill>
                   <a:srgbClr val="024C98"/>
                 </a:solidFill>
-                <a:latin typeface="Noto Sans CJK JP" pitchFamily="34" charset="0"/>
-                <a:ea typeface="Noto Sans CJK JP" pitchFamily="34" charset="-122"/>
-                <a:cs typeface="Noto Sans CJK JP" pitchFamily="34" charset="-120"/>
+                <a:latin typeface="BIZ UDPGothic" pitchFamily="34" charset="0"/>
+                <a:ea typeface="BIZ UDPGothic" pitchFamily="34" charset="-122"/>
+                <a:cs typeface="BIZ UDPGothic" pitchFamily="34" charset="-120"/>
               </a:rPr>
               <a:t>見つける</a:t>
             </a:r>
@@ -2840,9 +2840,9 @@
                 <a:solidFill>
                   <a:srgbClr val="102A43"/>
                 </a:solidFill>
-                <a:latin typeface="Noto Sans CJK JP" pitchFamily="34" charset="0"/>
-                <a:ea typeface="Noto Sans CJK JP" pitchFamily="34" charset="-122"/>
-                <a:cs typeface="Noto Sans CJK JP" pitchFamily="34" charset="-120"/>
+                <a:latin typeface="BIZ UDPGothic" pitchFamily="34" charset="0"/>
+                <a:ea typeface="BIZ UDPGothic" pitchFamily="34" charset="-122"/>
+                <a:cs typeface="BIZ UDPGothic" pitchFamily="34" charset="-120"/>
               </a:rPr>
               <a:t>視線の中にあるか</a:t>
             </a:r>
@@ -2931,9 +2931,9 @@
                 <a:solidFill>
                   <a:srgbClr val="1D5EA7"/>
                 </a:solidFill>
-                <a:latin typeface="Noto Sans CJK JP" pitchFamily="34" charset="0"/>
-                <a:ea typeface="Noto Sans CJK JP" pitchFamily="34" charset="-122"/>
-                <a:cs typeface="Noto Sans CJK JP" pitchFamily="34" charset="-120"/>
+                <a:latin typeface="BIZ UDPGothic" pitchFamily="34" charset="0"/>
+                <a:ea typeface="BIZ UDPGothic" pitchFamily="34" charset="-122"/>
+                <a:cs typeface="BIZ UDPGothic" pitchFamily="34" charset="-120"/>
               </a:rPr>
               <a:t>02</a:t>
             </a:r>
@@ -2970,9 +2970,9 @@
                 <a:solidFill>
                   <a:srgbClr val="024C98"/>
                 </a:solidFill>
-                <a:latin typeface="Noto Sans CJK JP" pitchFamily="34" charset="0"/>
-                <a:ea typeface="Noto Sans CJK JP" pitchFamily="34" charset="-122"/>
-                <a:cs typeface="Noto Sans CJK JP" pitchFamily="34" charset="-120"/>
+                <a:latin typeface="BIZ UDPGothic" pitchFamily="34" charset="0"/>
+                <a:ea typeface="BIZ UDPGothic" pitchFamily="34" charset="-122"/>
+                <a:cs typeface="BIZ UDPGothic" pitchFamily="34" charset="-120"/>
               </a:rPr>
               <a:t>読む</a:t>
             </a:r>
@@ -3009,9 +3009,9 @@
                 <a:solidFill>
                   <a:srgbClr val="102A43"/>
                 </a:solidFill>
-                <a:latin typeface="Noto Sans CJK JP" pitchFamily="34" charset="0"/>
-                <a:ea typeface="Noto Sans CJK JP" pitchFamily="34" charset="-122"/>
-                <a:cs typeface="Noto Sans CJK JP" pitchFamily="34" charset="-120"/>
+                <a:latin typeface="BIZ UDPGothic" pitchFamily="34" charset="0"/>
+                <a:ea typeface="BIZ UDPGothic" pitchFamily="34" charset="-122"/>
+                <a:cs typeface="BIZ UDPGothic" pitchFamily="34" charset="-120"/>
               </a:rPr>
               <a:t>文字と意味が分かるか</a:t>
             </a:r>
@@ -3100,9 +3100,9 @@
                 <a:solidFill>
                   <a:srgbClr val="1D5EA7"/>
                 </a:solidFill>
-                <a:latin typeface="Noto Sans CJK JP" pitchFamily="34" charset="0"/>
-                <a:ea typeface="Noto Sans CJK JP" pitchFamily="34" charset="-122"/>
-                <a:cs typeface="Noto Sans CJK JP" pitchFamily="34" charset="-120"/>
+                <a:latin typeface="BIZ UDPGothic" pitchFamily="34" charset="0"/>
+                <a:ea typeface="BIZ UDPGothic" pitchFamily="34" charset="-122"/>
+                <a:cs typeface="BIZ UDPGothic" pitchFamily="34" charset="-120"/>
               </a:rPr>
               <a:t>03</a:t>
             </a:r>
@@ -3139,9 +3139,9 @@
                 <a:solidFill>
                   <a:srgbClr val="024C98"/>
                 </a:solidFill>
-                <a:latin typeface="Noto Sans CJK JP" pitchFamily="34" charset="0"/>
-                <a:ea typeface="Noto Sans CJK JP" pitchFamily="34" charset="-122"/>
-                <a:cs typeface="Noto Sans CJK JP" pitchFamily="34" charset="-120"/>
+                <a:latin typeface="BIZ UDPGothic" pitchFamily="34" charset="0"/>
+                <a:ea typeface="BIZ UDPGothic" pitchFamily="34" charset="-122"/>
+                <a:cs typeface="BIZ UDPGothic" pitchFamily="34" charset="-120"/>
               </a:rPr>
               <a:t>方向を決める</a:t>
             </a:r>
@@ -3178,9 +3178,9 @@
                 <a:solidFill>
                   <a:srgbClr val="102A43"/>
                 </a:solidFill>
-                <a:latin typeface="Noto Sans CJK JP" pitchFamily="34" charset="0"/>
-                <a:ea typeface="Noto Sans CJK JP" pitchFamily="34" charset="-122"/>
-                <a:cs typeface="Noto Sans CJK JP" pitchFamily="34" charset="-120"/>
+                <a:latin typeface="BIZ UDPGothic" pitchFamily="34" charset="0"/>
+                <a:ea typeface="BIZ UDPGothic" pitchFamily="34" charset="-122"/>
+                <a:cs typeface="BIZ UDPGothic" pitchFamily="34" charset="-120"/>
               </a:rPr>
               <a:t>進む方向が一つに定まるか</a:t>
             </a:r>
@@ -3249,9 +3249,9 @@
                 <a:solidFill>
                   <a:srgbClr val="52677B"/>
                 </a:solidFill>
-                <a:latin typeface="Noto Sans CJK JP" pitchFamily="34" charset="0"/>
-                <a:ea typeface="Noto Sans CJK JP" pitchFamily="34" charset="-122"/>
-                <a:cs typeface="Noto Sans CJK JP" pitchFamily="34" charset="-120"/>
+                <a:latin typeface="BIZ UDPGothic" pitchFamily="34" charset="0"/>
+                <a:ea typeface="BIZ UDPGothic" pitchFamily="34" charset="-122"/>
+                <a:cs typeface="BIZ UDPGothic" pitchFamily="34" charset="-120"/>
               </a:rPr>
               <a:t>小さな道案内  /  研究計画</a:t>
             </a:r>
@@ -3288,9 +3288,9 @@
                 <a:solidFill>
                   <a:srgbClr val="024C98"/>
                 </a:solidFill>
-                <a:latin typeface="Noto Sans CJK JP" pitchFamily="34" charset="0"/>
-                <a:ea typeface="Noto Sans CJK JP" pitchFamily="34" charset="-122"/>
-                <a:cs typeface="Noto Sans CJK JP" pitchFamily="34" charset="-120"/>
+                <a:latin typeface="BIZ UDPGothic" pitchFamily="34" charset="0"/>
+                <a:ea typeface="BIZ UDPGothic" pitchFamily="34" charset="-122"/>
+                <a:cs typeface="BIZ UDPGothic" pitchFamily="34" charset="-120"/>
               </a:rPr>
               <a:t>03</a:t>
             </a:r>
@@ -3327,9 +3327,9 @@
                 <a:solidFill>
                   <a:srgbClr val="024C98"/>
                 </a:solidFill>
-                <a:latin typeface="Noto Sans CJK JP" pitchFamily="34" charset="0"/>
-                <a:ea typeface="Noto Sans CJK JP" pitchFamily="34" charset="-122"/>
-                <a:cs typeface="Noto Sans CJK JP" pitchFamily="34" charset="-120"/>
+                <a:latin typeface="BIZ UDPGothic" pitchFamily="34" charset="0"/>
+                <a:ea typeface="BIZ UDPGothic" pitchFamily="34" charset="-122"/>
+                <a:cs typeface="BIZ UDPGothic" pitchFamily="34" charset="-120"/>
               </a:rPr>
               <a:t>分岐に情報を集めすぎない</a:t>
             </a:r>
@@ -3393,9 +3393,9 @@
                 <a:solidFill>
                   <a:srgbClr val="52677B"/>
                 </a:solidFill>
-                <a:latin typeface="Noto Sans CJK JP" pitchFamily="34" charset="0"/>
-                <a:ea typeface="Noto Sans CJK JP" pitchFamily="34" charset="-122"/>
-                <a:cs typeface="Noto Sans CJK JP" pitchFamily="34" charset="-120"/>
+                <a:latin typeface="BIZ UDPGothic" pitchFamily="34" charset="0"/>
+                <a:ea typeface="BIZ UDPGothic" pitchFamily="34" charset="-122"/>
+                <a:cs typeface="BIZ UDPGothic" pitchFamily="34" charset="-120"/>
               </a:rPr>
               <a:t>架空・未実施の研究提案</a:t>
             </a:r>
@@ -3432,9 +3432,9 @@
                 <a:solidFill>
                   <a:srgbClr val="52677B"/>
                 </a:solidFill>
-                <a:latin typeface="Noto Sans CJK JP" pitchFamily="34" charset="0"/>
-                <a:ea typeface="Noto Sans CJK JP" pitchFamily="34" charset="-122"/>
-                <a:cs typeface="Noto Sans CJK JP" pitchFamily="34" charset="-120"/>
+                <a:latin typeface="BIZ UDPGothic" pitchFamily="34" charset="0"/>
+                <a:ea typeface="BIZ UDPGothic" pitchFamily="34" charset="-122"/>
+                <a:cs typeface="BIZ UDPGothic" pitchFamily="34" charset="-120"/>
               </a:rPr>
               <a:t>比較用の設計案。優劣は、これから確かめる。</a:t>
             </a:r>
@@ -3471,9 +3471,9 @@
                 <a:solidFill>
                   <a:srgbClr val="52677B"/>
                 </a:solidFill>
-                <a:latin typeface="Noto Sans CJK JP" pitchFamily="34" charset="0"/>
-                <a:ea typeface="Noto Sans CJK JP" pitchFamily="34" charset="-122"/>
-                <a:cs typeface="Noto Sans CJK JP" pitchFamily="34" charset="-120"/>
+                <a:latin typeface="BIZ UDPGothic" pitchFamily="34" charset="0"/>
+                <a:ea typeface="BIZ UDPGothic" pitchFamily="34" charset="-122"/>
+                <a:cs typeface="BIZ UDPGothic" pitchFamily="34" charset="-120"/>
               </a:rPr>
               <a:t>情報を並べた案</a:t>
             </a:r>
@@ -3510,9 +3510,9 @@
                 <a:solidFill>
                   <a:srgbClr val="024C98"/>
                 </a:solidFill>
-                <a:latin typeface="Noto Sans CJK JP" pitchFamily="34" charset="0"/>
-                <a:ea typeface="Noto Sans CJK JP" pitchFamily="34" charset="-122"/>
-                <a:cs typeface="Noto Sans CJK JP" pitchFamily="34" charset="-120"/>
+                <a:latin typeface="BIZ UDPGothic" pitchFamily="34" charset="0"/>
+                <a:ea typeface="BIZ UDPGothic" pitchFamily="34" charset="-122"/>
+                <a:cs typeface="BIZ UDPGothic" pitchFamily="34" charset="-120"/>
               </a:rPr>
               <a:t>次の判断に絞った案</a:t>
             </a:r>
@@ -3549,170 +3549,14 @@
       </p:sp>
       <p:sp>
         <p:nvSpPr>
-          <p:cNvPr id="12" name="text-45"/>
-          <p:cNvSpPr/>
-          <p:nvPr/>
-        </p:nvSpPr>
-        <p:spPr>
-          <a:xfrm>
-            <a:off x="914400" y="3520440"/>
-            <a:ext cx="2103120" cy="457200"/>
-          </a:xfrm>
-          <a:prstGeom prst="rect">
-            <a:avLst/>
-          </a:prstGeom>
-          <a:noFill/>
-          <a:ln/>
-        </p:spPr>
-        <p:txBody>
-          <a:bodyPr wrap="square" lIns="0" tIns="0" rIns="0" bIns="0" rtlCol="0" anchor="ctr"/>
-          <a:lstStyle/>
-          <a:p>
-            <a:pPr indent="0" marL="0">
-              <a:buNone/>
-            </a:pPr>
-            <a:r>
-              <a:rPr lang="en-US" sz="2400" dirty="0">
-                <a:solidFill>
-                  <a:srgbClr val="52677B"/>
-                </a:solidFill>
-                <a:latin typeface="Noto Sans CJK JP" pitchFamily="34" charset="0"/>
-                <a:ea typeface="Noto Sans CJK JP" pitchFamily="34" charset="-122"/>
-                <a:cs typeface="Noto Sans CJK JP" pitchFamily="34" charset="-120"/>
-              </a:rPr>
-              <a:t>受付</a:t>
-            </a:r>
-            <a:endParaRPr lang="en-US" sz="2400" dirty="0"/>
-          </a:p>
-        </p:txBody>
-      </p:sp>
-      <p:sp>
-        <p:nvSpPr>
-          <p:cNvPr id="13" name="text-46"/>
-          <p:cNvSpPr/>
-          <p:nvPr/>
-        </p:nvSpPr>
-        <p:spPr>
-          <a:xfrm>
-            <a:off x="3154680" y="3749040"/>
-            <a:ext cx="2103120" cy="457200"/>
-          </a:xfrm>
-          <a:prstGeom prst="rect">
-            <a:avLst/>
-          </a:prstGeom>
-          <a:noFill/>
-          <a:ln/>
-        </p:spPr>
-        <p:txBody>
-          <a:bodyPr wrap="square" lIns="0" tIns="0" rIns="0" bIns="0" rtlCol="0" anchor="ctr"/>
-          <a:lstStyle/>
-          <a:p>
-            <a:pPr indent="0" marL="0">
-              <a:buNone/>
-            </a:pPr>
-            <a:r>
-              <a:rPr lang="en-US" sz="1800" dirty="0">
-                <a:solidFill>
-                  <a:srgbClr val="52677B"/>
-                </a:solidFill>
-                <a:latin typeface="Noto Sans CJK JP" pitchFamily="34" charset="0"/>
-                <a:ea typeface="Noto Sans CJK JP" pitchFamily="34" charset="-122"/>
-                <a:cs typeface="Noto Sans CJK JP" pitchFamily="34" charset="-120"/>
-              </a:rPr>
-              <a:t>トイレ</a:t>
-            </a:r>
-            <a:endParaRPr lang="en-US" sz="1800" dirty="0"/>
-          </a:p>
-        </p:txBody>
-      </p:sp>
-      <p:sp>
-        <p:nvSpPr>
-          <p:cNvPr id="14" name="text-47"/>
-          <p:cNvSpPr/>
-          <p:nvPr/>
-        </p:nvSpPr>
-        <p:spPr>
-          <a:xfrm>
-            <a:off x="2468880" y="4617720"/>
-            <a:ext cx="2103120" cy="457200"/>
-          </a:xfrm>
-          <a:prstGeom prst="rect">
-            <a:avLst/>
-          </a:prstGeom>
-          <a:noFill/>
-          <a:ln/>
-        </p:spPr>
-        <p:txBody>
-          <a:bodyPr wrap="square" lIns="0" tIns="0" rIns="0" bIns="0" rtlCol="0" anchor="ctr"/>
-          <a:lstStyle/>
-          <a:p>
-            <a:pPr indent="0" marL="0">
-              <a:buNone/>
-            </a:pPr>
-            <a:r>
-              <a:rPr lang="en-US" sz="2900" dirty="0">
-                <a:solidFill>
-                  <a:srgbClr val="52677B"/>
-                </a:solidFill>
-                <a:latin typeface="Noto Sans CJK JP" pitchFamily="34" charset="0"/>
-                <a:ea typeface="Noto Sans CJK JP" pitchFamily="34" charset="-122"/>
-                <a:cs typeface="Noto Sans CJK JP" pitchFamily="34" charset="-120"/>
-              </a:rPr>
-              <a:t>待合</a:t>
-            </a:r>
-            <a:endParaRPr lang="en-US" sz="2900" dirty="0"/>
-          </a:p>
-        </p:txBody>
-      </p:sp>
-      <p:sp>
-        <p:nvSpPr>
-          <p:cNvPr id="15" name="text-48"/>
-          <p:cNvSpPr/>
-          <p:nvPr/>
-        </p:nvSpPr>
-        <p:spPr>
-          <a:xfrm>
-            <a:off x="777240" y="5029200"/>
-            <a:ext cx="2103120" cy="457200"/>
-          </a:xfrm>
-          <a:prstGeom prst="rect">
-            <a:avLst/>
-          </a:prstGeom>
-          <a:noFill/>
-          <a:ln/>
-        </p:spPr>
-        <p:txBody>
-          <a:bodyPr wrap="square" lIns="0" tIns="0" rIns="0" bIns="0" rtlCol="0" anchor="ctr"/>
-          <a:lstStyle/>
-          <a:p>
-            <a:pPr indent="0" marL="0">
-              <a:buNone/>
-            </a:pPr>
-            <a:r>
-              <a:rPr lang="en-US" sz="1900" dirty="0">
-                <a:solidFill>
-                  <a:srgbClr val="52677B"/>
-                </a:solidFill>
-                <a:latin typeface="Noto Sans CJK JP" pitchFamily="34" charset="0"/>
-                <a:ea typeface="Noto Sans CJK JP" pitchFamily="34" charset="-122"/>
-                <a:cs typeface="Noto Sans CJK JP" pitchFamily="34" charset="-120"/>
-              </a:rPr>
-              <a:t>相談室</a:t>
-            </a:r>
-            <a:endParaRPr lang="en-US" sz="1900" dirty="0"/>
-          </a:p>
-        </p:txBody>
-      </p:sp>
-      <p:sp>
-        <p:nvSpPr>
-          <p:cNvPr id="16" name="shape-49"/>
-          <p:cNvSpPr/>
-          <p:nvPr/>
-        </p:nvSpPr>
-        <p:spPr>
-          <a:xfrm>
-            <a:off x="6400800" y="3520440"/>
-            <a:ext cx="4937760" cy="1298448"/>
+          <p:cNvPr id="12" name="COMPARISON_sign_list"/>
+          <p:cNvSpPr/>
+          <p:nvPr/>
+        </p:nvSpPr>
+        <p:spPr>
+          <a:xfrm>
+            <a:off x="777240" y="3520440"/>
+            <a:ext cx="4846320" cy="1298448"/>
           </a:xfrm>
           <a:prstGeom prst="rect">
             <a:avLst/>
@@ -3730,7 +3574,188 @@
       </p:sp>
       <p:sp>
         <p:nvSpPr>
-          <p:cNvPr id="17" name="text-50"/>
+          <p:cNvPr id="13" name="text-45"/>
+          <p:cNvSpPr/>
+          <p:nvPr/>
+        </p:nvSpPr>
+        <p:spPr>
+          <a:xfrm>
+            <a:off x="1024128" y="3675888"/>
+            <a:ext cx="1920240" cy="411480"/>
+          </a:xfrm>
+          <a:prstGeom prst="rect">
+            <a:avLst/>
+          </a:prstGeom>
+          <a:noFill/>
+          <a:ln/>
+        </p:spPr>
+        <p:txBody>
+          <a:bodyPr wrap="square" lIns="0" tIns="0" rIns="0" bIns="0" rtlCol="0" anchor="ctr"/>
+          <a:lstStyle/>
+          <a:p>
+            <a:pPr indent="0" marL="0">
+              <a:buNone/>
+            </a:pPr>
+            <a:r>
+              <a:rPr lang="en-US" sz="2400" b="1" dirty="0">
+                <a:solidFill>
+                  <a:srgbClr val="FFFFFF"/>
+                </a:solidFill>
+                <a:latin typeface="BIZ UDPGothic" pitchFamily="34" charset="0"/>
+                <a:ea typeface="BIZ UDPGothic" pitchFamily="34" charset="-122"/>
+                <a:cs typeface="BIZ UDPGothic" pitchFamily="34" charset="-120"/>
+              </a:rPr>
+              <a:t>受付</a:t>
+            </a:r>
+            <a:endParaRPr lang="en-US" sz="2400" dirty="0"/>
+          </a:p>
+        </p:txBody>
+      </p:sp>
+      <p:sp>
+        <p:nvSpPr>
+          <p:cNvPr id="14" name="text-46"/>
+          <p:cNvSpPr/>
+          <p:nvPr/>
+        </p:nvSpPr>
+        <p:spPr>
+          <a:xfrm>
+            <a:off x="3337560" y="3675888"/>
+            <a:ext cx="1920240" cy="411480"/>
+          </a:xfrm>
+          <a:prstGeom prst="rect">
+            <a:avLst/>
+          </a:prstGeom>
+          <a:noFill/>
+          <a:ln/>
+        </p:spPr>
+        <p:txBody>
+          <a:bodyPr wrap="square" lIns="0" tIns="0" rIns="0" bIns="0" rtlCol="0" anchor="ctr"/>
+          <a:lstStyle/>
+          <a:p>
+            <a:pPr indent="0" marL="0">
+              <a:buNone/>
+            </a:pPr>
+            <a:r>
+              <a:rPr lang="en-US" sz="2400" b="1" dirty="0">
+                <a:solidFill>
+                  <a:srgbClr val="FFFFFF"/>
+                </a:solidFill>
+                <a:latin typeface="BIZ UDPGothic" pitchFamily="34" charset="0"/>
+                <a:ea typeface="BIZ UDPGothic" pitchFamily="34" charset="-122"/>
+                <a:cs typeface="BIZ UDPGothic" pitchFamily="34" charset="-120"/>
+              </a:rPr>
+              <a:t>トイレ</a:t>
+            </a:r>
+            <a:endParaRPr lang="en-US" sz="2400" dirty="0"/>
+          </a:p>
+        </p:txBody>
+      </p:sp>
+      <p:sp>
+        <p:nvSpPr>
+          <p:cNvPr id="15" name="text-47"/>
+          <p:cNvSpPr/>
+          <p:nvPr/>
+        </p:nvSpPr>
+        <p:spPr>
+          <a:xfrm>
+            <a:off x="1024128" y="4352544"/>
+            <a:ext cx="1920240" cy="411480"/>
+          </a:xfrm>
+          <a:prstGeom prst="rect">
+            <a:avLst/>
+          </a:prstGeom>
+          <a:noFill/>
+          <a:ln/>
+        </p:spPr>
+        <p:txBody>
+          <a:bodyPr wrap="square" lIns="0" tIns="0" rIns="0" bIns="0" rtlCol="0" anchor="ctr"/>
+          <a:lstStyle/>
+          <a:p>
+            <a:pPr indent="0" marL="0">
+              <a:buNone/>
+            </a:pPr>
+            <a:r>
+              <a:rPr lang="en-US" sz="2400" b="1" dirty="0">
+                <a:solidFill>
+                  <a:srgbClr val="FFFFFF"/>
+                </a:solidFill>
+                <a:latin typeface="BIZ UDPGothic" pitchFamily="34" charset="0"/>
+                <a:ea typeface="BIZ UDPGothic" pitchFamily="34" charset="-122"/>
+                <a:cs typeface="BIZ UDPGothic" pitchFamily="34" charset="-120"/>
+              </a:rPr>
+              <a:t>待合</a:t>
+            </a:r>
+            <a:endParaRPr lang="en-US" sz="2400" dirty="0"/>
+          </a:p>
+        </p:txBody>
+      </p:sp>
+      <p:sp>
+        <p:nvSpPr>
+          <p:cNvPr id="16" name="text-48"/>
+          <p:cNvSpPr/>
+          <p:nvPr/>
+        </p:nvSpPr>
+        <p:spPr>
+          <a:xfrm>
+            <a:off x="3337560" y="4352544"/>
+            <a:ext cx="1920240" cy="411480"/>
+          </a:xfrm>
+          <a:prstGeom prst="rect">
+            <a:avLst/>
+          </a:prstGeom>
+          <a:noFill/>
+          <a:ln/>
+        </p:spPr>
+        <p:txBody>
+          <a:bodyPr wrap="square" lIns="0" tIns="0" rIns="0" bIns="0" rtlCol="0" anchor="ctr"/>
+          <a:lstStyle/>
+          <a:p>
+            <a:pPr indent="0" marL="0">
+              <a:buNone/>
+            </a:pPr>
+            <a:r>
+              <a:rPr lang="en-US" sz="2400" b="1" dirty="0">
+                <a:solidFill>
+                  <a:srgbClr val="FFFFFF"/>
+                </a:solidFill>
+                <a:latin typeface="BIZ UDPGothic" pitchFamily="34" charset="0"/>
+                <a:ea typeface="BIZ UDPGothic" pitchFamily="34" charset="-122"/>
+                <a:cs typeface="BIZ UDPGothic" pitchFamily="34" charset="-120"/>
+              </a:rPr>
+              <a:t>相談室</a:t>
+            </a:r>
+            <a:endParaRPr lang="en-US" sz="2400" dirty="0"/>
+          </a:p>
+        </p:txBody>
+      </p:sp>
+      <p:sp>
+        <p:nvSpPr>
+          <p:cNvPr id="17" name="shape-49"/>
+          <p:cNvSpPr/>
+          <p:nvPr/>
+        </p:nvSpPr>
+        <p:spPr>
+          <a:xfrm>
+            <a:off x="6400800" y="3520440"/>
+            <a:ext cx="4937760" cy="1298448"/>
+          </a:xfrm>
+          <a:prstGeom prst="rect">
+            <a:avLst/>
+          </a:prstGeom>
+          <a:solidFill>
+            <a:srgbClr val="024C98"/>
+          </a:solidFill>
+          <a:ln w="12700">
+            <a:solidFill>
+              <a:srgbClr val="024C98"/>
+            </a:solidFill>
+            <a:prstDash val="solid"/>
+          </a:ln>
+        </p:spPr>
+      </p:sp>
+      <p:sp>
+        <p:nvSpPr>
+          <p:cNvPr id="18" name="text-50"/>
           <p:cNvSpPr/>
           <p:nvPr/>
         </p:nvSpPr>
@@ -3757,9 +3782,9 @@
                 <a:solidFill>
                   <a:srgbClr val="FFFFFF"/>
                 </a:solidFill>
-                <a:latin typeface="Noto Sans CJK JP" pitchFamily="34" charset="0"/>
-                <a:ea typeface="Noto Sans CJK JP" pitchFamily="34" charset="-122"/>
-                <a:cs typeface="Noto Sans CJK JP" pitchFamily="34" charset="-120"/>
+                <a:latin typeface="BIZ UDPGothic" pitchFamily="34" charset="0"/>
+                <a:ea typeface="BIZ UDPGothic" pitchFamily="34" charset="-122"/>
+                <a:cs typeface="BIZ UDPGothic" pitchFamily="34" charset="-120"/>
               </a:rPr>
               <a:t>→ 受付</a:t>
             </a:r>
@@ -3769,7 +3794,7 @@
       </p:sp>
       <p:sp>
         <p:nvSpPr>
-          <p:cNvPr id="18" name="text-51"/>
+          <p:cNvPr id="19" name="text-51"/>
           <p:cNvSpPr/>
           <p:nvPr/>
         </p:nvSpPr>
@@ -3796,9 +3821,9 @@
                 <a:solidFill>
                   <a:srgbClr val="FFFFFF"/>
                 </a:solidFill>
-                <a:latin typeface="Noto Sans CJK JP" pitchFamily="34" charset="0"/>
-                <a:ea typeface="Noto Sans CJK JP" pitchFamily="34" charset="-122"/>
-                <a:cs typeface="Noto Sans CJK JP" pitchFamily="34" charset="-120"/>
+                <a:latin typeface="BIZ UDPGothic" pitchFamily="34" charset="0"/>
+                <a:ea typeface="BIZ UDPGothic" pitchFamily="34" charset="-122"/>
+                <a:cs typeface="BIZ UDPGothic" pitchFamily="34" charset="-120"/>
               </a:rPr>
               <a:t>青い壁を目印に</a:t>
             </a:r>
@@ -3808,7 +3833,7 @@
       </p:sp>
       <p:sp>
         <p:nvSpPr>
-          <p:cNvPr id="19" name="text-52"/>
+          <p:cNvPr id="20" name="text-52"/>
           <p:cNvSpPr/>
           <p:nvPr/>
         </p:nvSpPr>
@@ -3835,9 +3860,9 @@
                 <a:solidFill>
                   <a:srgbClr val="102A43"/>
                 </a:solidFill>
-                <a:latin typeface="Noto Sans CJK JP" pitchFamily="34" charset="0"/>
-                <a:ea typeface="Noto Sans CJK JP" pitchFamily="34" charset="-122"/>
-                <a:cs typeface="Noto Sans CJK JP" pitchFamily="34" charset="-120"/>
+                <a:latin typeface="BIZ UDPGothic" pitchFamily="34" charset="0"/>
+                <a:ea typeface="BIZ UDPGothic" pitchFamily="34" charset="-122"/>
+                <a:cs typeface="BIZ UDPGothic" pitchFamily="34" charset="-120"/>
               </a:rPr>
               <a:t>仮説A  分岐の前に行き先を絞る</a:t>
             </a:r>
@@ -3852,9 +3877,9 @@
                 <a:solidFill>
                   <a:srgbClr val="102A43"/>
                 </a:solidFill>
-                <a:latin typeface="Noto Sans CJK JP" pitchFamily="34" charset="0"/>
-                <a:ea typeface="Noto Sans CJK JP" pitchFamily="34" charset="-122"/>
-                <a:cs typeface="Noto Sans CJK JP" pitchFamily="34" charset="-120"/>
+                <a:latin typeface="BIZ UDPGothic" pitchFamily="34" charset="0"/>
+                <a:ea typeface="BIZ UDPGothic" pitchFamily="34" charset="-122"/>
+                <a:cs typeface="BIZ UDPGothic" pitchFamily="34" charset="-120"/>
               </a:rPr>
               <a:t>仮説B  矢印・行き先・目印を反復する</a:t>
             </a:r>
@@ -3923,9 +3948,9 @@
                 <a:solidFill>
                   <a:srgbClr val="52677B"/>
                 </a:solidFill>
-                <a:latin typeface="Noto Sans CJK JP" pitchFamily="34" charset="0"/>
-                <a:ea typeface="Noto Sans CJK JP" pitchFamily="34" charset="-122"/>
-                <a:cs typeface="Noto Sans CJK JP" pitchFamily="34" charset="-120"/>
+                <a:latin typeface="BIZ UDPGothic" pitchFamily="34" charset="0"/>
+                <a:ea typeface="BIZ UDPGothic" pitchFamily="34" charset="-122"/>
+                <a:cs typeface="BIZ UDPGothic" pitchFamily="34" charset="-120"/>
               </a:rPr>
               <a:t>小さな道案内  /  研究計画</a:t>
             </a:r>
@@ -3962,9 +3987,9 @@
                 <a:solidFill>
                   <a:srgbClr val="024C98"/>
                 </a:solidFill>
-                <a:latin typeface="Noto Sans CJK JP" pitchFamily="34" charset="0"/>
-                <a:ea typeface="Noto Sans CJK JP" pitchFamily="34" charset="-122"/>
-                <a:cs typeface="Noto Sans CJK JP" pitchFamily="34" charset="-120"/>
+                <a:latin typeface="BIZ UDPGothic" pitchFamily="34" charset="0"/>
+                <a:ea typeface="BIZ UDPGothic" pitchFamily="34" charset="-122"/>
+                <a:cs typeface="BIZ UDPGothic" pitchFamily="34" charset="-120"/>
               </a:rPr>
               <a:t>04</a:t>
             </a:r>
@@ -4001,9 +4026,9 @@
                 <a:solidFill>
                   <a:srgbClr val="024C98"/>
                 </a:solidFill>
-                <a:latin typeface="Noto Sans CJK JP" pitchFamily="34" charset="0"/>
-                <a:ea typeface="Noto Sans CJK JP" pitchFamily="34" charset="-122"/>
-                <a:cs typeface="Noto Sans CJK JP" pitchFamily="34" charset="-120"/>
+                <a:latin typeface="BIZ UDPGothic" pitchFamily="34" charset="0"/>
+                <a:ea typeface="BIZ UDPGothic" pitchFamily="34" charset="-122"/>
+                <a:cs typeface="BIZ UDPGothic" pitchFamily="34" charset="-120"/>
               </a:rPr>
               <a:t>サインを一枚ではなく、連続として設計する</a:t>
             </a:r>
@@ -4067,9 +4092,9 @@
                 <a:solidFill>
                   <a:srgbClr val="52677B"/>
                 </a:solidFill>
-                <a:latin typeface="Noto Sans CJK JP" pitchFamily="34" charset="0"/>
-                <a:ea typeface="Noto Sans CJK JP" pitchFamily="34" charset="-122"/>
-                <a:cs typeface="Noto Sans CJK JP" pitchFamily="34" charset="-120"/>
+                <a:latin typeface="BIZ UDPGothic" pitchFamily="34" charset="0"/>
+                <a:ea typeface="BIZ UDPGothic" pitchFamily="34" charset="-122"/>
+                <a:cs typeface="BIZ UDPGothic" pitchFamily="34" charset="-120"/>
               </a:rPr>
               <a:t>架空・未実施の研究提案</a:t>
             </a:r>
@@ -4106,9 +4131,9 @@
                 <a:solidFill>
                   <a:srgbClr val="102A43"/>
                 </a:solidFill>
-                <a:latin typeface="Noto Sans CJK JP" pitchFamily="34" charset="0"/>
-                <a:ea typeface="Noto Sans CJK JP" pitchFamily="34" charset="-122"/>
-                <a:cs typeface="Noto Sans CJK JP" pitchFamily="34" charset="-120"/>
+                <a:latin typeface="BIZ UDPGothic" pitchFamily="34" charset="0"/>
+                <a:ea typeface="BIZ UDPGothic" pitchFamily="34" charset="-122"/>
+                <a:cs typeface="BIZ UDPGothic" pitchFamily="34" charset="-120"/>
               </a:rPr>
               <a:t>入口の全体案内。分岐前の方向案内。到着時の確認表示。</a:t>
             </a:r>
@@ -4282,8 +4307,8 @@
         </p:nvSpPr>
         <p:spPr>
           <a:xfrm>
-            <a:off x="960120" y="5623560"/>
-            <a:ext cx="1371600" cy="320040"/>
+            <a:off x="960120" y="5449824"/>
+            <a:ext cx="1371600" cy="274320"/>
           </a:xfrm>
           <a:prstGeom prst="rect">
             <a:avLst/>
@@ -4303,9 +4328,9 @@
                 <a:solidFill>
                   <a:srgbClr val="102A43"/>
                 </a:solidFill>
-                <a:latin typeface="Noto Sans CJK JP" pitchFamily="34" charset="0"/>
-                <a:ea typeface="Noto Sans CJK JP" pitchFamily="34" charset="-122"/>
-                <a:cs typeface="Noto Sans CJK JP" pitchFamily="34" charset="-120"/>
+                <a:latin typeface="BIZ UDPGothic" pitchFamily="34" charset="0"/>
+                <a:ea typeface="BIZ UDPGothic" pitchFamily="34" charset="-122"/>
+                <a:cs typeface="BIZ UDPGothic" pitchFamily="34" charset="-120"/>
               </a:rPr>
               <a:t>入口</a:t>
             </a:r>
@@ -4342,9 +4367,9 @@
                 <a:solidFill>
                   <a:srgbClr val="102A43"/>
                 </a:solidFill>
-                <a:latin typeface="Noto Sans CJK JP" pitchFamily="34" charset="0"/>
-                <a:ea typeface="Noto Sans CJK JP" pitchFamily="34" charset="-122"/>
-                <a:cs typeface="Noto Sans CJK JP" pitchFamily="34" charset="-120"/>
+                <a:latin typeface="BIZ UDPGothic" pitchFamily="34" charset="0"/>
+                <a:ea typeface="BIZ UDPGothic" pitchFamily="34" charset="-122"/>
+                <a:cs typeface="BIZ UDPGothic" pitchFamily="34" charset="-120"/>
               </a:rPr>
               <a:t>分岐</a:t>
             </a:r>
@@ -4381,9 +4406,9 @@
                 <a:solidFill>
                   <a:srgbClr val="024C98"/>
                 </a:solidFill>
-                <a:latin typeface="Noto Sans CJK JP" pitchFamily="34" charset="0"/>
-                <a:ea typeface="Noto Sans CJK JP" pitchFamily="34" charset="-122"/>
-                <a:cs typeface="Noto Sans CJK JP" pitchFamily="34" charset="-120"/>
+                <a:latin typeface="BIZ UDPGothic" pitchFamily="34" charset="0"/>
+                <a:ea typeface="BIZ UDPGothic" pitchFamily="34" charset="-122"/>
+                <a:cs typeface="BIZ UDPGothic" pitchFamily="34" charset="-120"/>
               </a:rPr>
               <a:t>受付</a:t>
             </a:r>
@@ -4420,9 +4445,9 @@
                 <a:solidFill>
                   <a:srgbClr val="52677B"/>
                 </a:solidFill>
-                <a:latin typeface="Noto Sans CJK JP" pitchFamily="34" charset="0"/>
-                <a:ea typeface="Noto Sans CJK JP" pitchFamily="34" charset="-122"/>
-                <a:cs typeface="Noto Sans CJK JP" pitchFamily="34" charset="-120"/>
+                <a:latin typeface="BIZ UDPGothic" pitchFamily="34" charset="0"/>
+                <a:ea typeface="BIZ UDPGothic" pitchFamily="34" charset="-122"/>
+                <a:cs typeface="BIZ UDPGothic" pitchFamily="34" charset="-120"/>
               </a:rPr>
               <a:t>待合</a:t>
             </a:r>
@@ -4438,8 +4463,8 @@
         </p:nvSpPr>
         <p:spPr>
           <a:xfrm>
-            <a:off x="3291840" y="2898648"/>
-            <a:ext cx="1371600" cy="274320"/>
+            <a:off x="2468880" y="2990088"/>
+            <a:ext cx="1097280" cy="274320"/>
           </a:xfrm>
           <a:prstGeom prst="rect">
             <a:avLst/>
@@ -4459,9 +4484,9 @@
                 <a:solidFill>
                   <a:srgbClr val="52677B"/>
                 </a:solidFill>
-                <a:latin typeface="Noto Sans CJK JP" pitchFamily="34" charset="0"/>
-                <a:ea typeface="Noto Sans CJK JP" pitchFamily="34" charset="-122"/>
-                <a:cs typeface="Noto Sans CJK JP" pitchFamily="34" charset="-120"/>
+                <a:latin typeface="BIZ UDPGothic" pitchFamily="34" charset="0"/>
+                <a:ea typeface="BIZ UDPGothic" pitchFamily="34" charset="-122"/>
+                <a:cs typeface="BIZ UDPGothic" pitchFamily="34" charset="-120"/>
               </a:rPr>
               <a:t>トイレ</a:t>
             </a:r>
@@ -4523,9 +4548,9 @@
                 <a:solidFill>
                   <a:srgbClr val="FFFFFF"/>
                 </a:solidFill>
-                <a:latin typeface="Noto Sans CJK JP" pitchFamily="34" charset="0"/>
-                <a:ea typeface="Noto Sans CJK JP" pitchFamily="34" charset="-122"/>
-                <a:cs typeface="Noto Sans CJK JP" pitchFamily="34" charset="-120"/>
+                <a:latin typeface="BIZ UDPGothic" pitchFamily="34" charset="0"/>
+                <a:ea typeface="BIZ UDPGothic" pitchFamily="34" charset="-122"/>
+                <a:cs typeface="BIZ UDPGothic" pitchFamily="34" charset="-120"/>
               </a:rPr>
               <a:t>A</a:t>
             </a:r>
@@ -4587,9 +4612,9 @@
                 <a:solidFill>
                   <a:srgbClr val="FFFFFF"/>
                 </a:solidFill>
-                <a:latin typeface="Noto Sans CJK JP" pitchFamily="34" charset="0"/>
-                <a:ea typeface="Noto Sans CJK JP" pitchFamily="34" charset="-122"/>
-                <a:cs typeface="Noto Sans CJK JP" pitchFamily="34" charset="-120"/>
+                <a:latin typeface="BIZ UDPGothic" pitchFamily="34" charset="0"/>
+                <a:ea typeface="BIZ UDPGothic" pitchFamily="34" charset="-122"/>
+                <a:cs typeface="BIZ UDPGothic" pitchFamily="34" charset="-120"/>
               </a:rPr>
               <a:t>B</a:t>
             </a:r>
@@ -4651,9 +4676,9 @@
                 <a:solidFill>
                   <a:srgbClr val="FFFFFF"/>
                 </a:solidFill>
-                <a:latin typeface="Noto Sans CJK JP" pitchFamily="34" charset="0"/>
-                <a:ea typeface="Noto Sans CJK JP" pitchFamily="34" charset="-122"/>
-                <a:cs typeface="Noto Sans CJK JP" pitchFamily="34" charset="-120"/>
+                <a:latin typeface="BIZ UDPGothic" pitchFamily="34" charset="0"/>
+                <a:ea typeface="BIZ UDPGothic" pitchFamily="34" charset="-122"/>
+                <a:cs typeface="BIZ UDPGothic" pitchFamily="34" charset="-120"/>
               </a:rPr>
               <a:t>C</a:t>
             </a:r>
@@ -4690,9 +4715,9 @@
                 <a:solidFill>
                   <a:srgbClr val="024C98"/>
                 </a:solidFill>
-                <a:latin typeface="Noto Sans CJK JP" pitchFamily="34" charset="0"/>
-                <a:ea typeface="Noto Sans CJK JP" pitchFamily="34" charset="-122"/>
-                <a:cs typeface="Noto Sans CJK JP" pitchFamily="34" charset="-120"/>
+                <a:latin typeface="BIZ UDPGothic" pitchFamily="34" charset="0"/>
+                <a:ea typeface="BIZ UDPGothic" pitchFamily="34" charset="-122"/>
+                <a:cs typeface="BIZ UDPGothic" pitchFamily="34" charset="-120"/>
               </a:rPr>
               <a:t>A  全体</a:t>
             </a:r>
@@ -4729,9 +4754,9 @@
                 <a:solidFill>
                   <a:srgbClr val="024C98"/>
                 </a:solidFill>
-                <a:latin typeface="Noto Sans CJK JP" pitchFamily="34" charset="0"/>
-                <a:ea typeface="Noto Sans CJK JP" pitchFamily="34" charset="-122"/>
-                <a:cs typeface="Noto Sans CJK JP" pitchFamily="34" charset="-120"/>
+                <a:latin typeface="BIZ UDPGothic" pitchFamily="34" charset="0"/>
+                <a:ea typeface="BIZ UDPGothic" pitchFamily="34" charset="-122"/>
+                <a:cs typeface="BIZ UDPGothic" pitchFamily="34" charset="-120"/>
               </a:rPr>
               <a:t>B  方向</a:t>
             </a:r>
@@ -4768,9 +4793,9 @@
                 <a:solidFill>
                   <a:srgbClr val="024C98"/>
                 </a:solidFill>
-                <a:latin typeface="Noto Sans CJK JP" pitchFamily="34" charset="0"/>
-                <a:ea typeface="Noto Sans CJK JP" pitchFamily="34" charset="-122"/>
-                <a:cs typeface="Noto Sans CJK JP" pitchFamily="34" charset="-120"/>
+                <a:latin typeface="BIZ UDPGothic" pitchFamily="34" charset="0"/>
+                <a:ea typeface="BIZ UDPGothic" pitchFamily="34" charset="-122"/>
+                <a:cs typeface="BIZ UDPGothic" pitchFamily="34" charset="-120"/>
               </a:rPr>
               <a:t>C  到着</a:t>
             </a:r>
@@ -4807,9 +4832,9 @@
                 <a:solidFill>
                   <a:srgbClr val="52677B"/>
                 </a:solidFill>
-                <a:latin typeface="Noto Sans CJK JP" pitchFamily="34" charset="0"/>
-                <a:ea typeface="Noto Sans CJK JP" pitchFamily="34" charset="-122"/>
-                <a:cs typeface="Noto Sans CJK JP" pitchFamily="34" charset="-120"/>
+                <a:latin typeface="BIZ UDPGothic" pitchFamily="34" charset="0"/>
+                <a:ea typeface="BIZ UDPGothic" pitchFamily="34" charset="-122"/>
+                <a:cs typeface="BIZ UDPGothic" pitchFamily="34" charset="-120"/>
               </a:rPr>
               <a:t>架空平面・縮尺なし</a:t>
             </a:r>
@@ -4878,9 +4903,9 @@
                 <a:solidFill>
                   <a:srgbClr val="52677B"/>
                 </a:solidFill>
-                <a:latin typeface="Noto Sans CJK JP" pitchFamily="34" charset="0"/>
-                <a:ea typeface="Noto Sans CJK JP" pitchFamily="34" charset="-122"/>
-                <a:cs typeface="Noto Sans CJK JP" pitchFamily="34" charset="-120"/>
+                <a:latin typeface="BIZ UDPGothic" pitchFamily="34" charset="0"/>
+                <a:ea typeface="BIZ UDPGothic" pitchFamily="34" charset="-122"/>
+                <a:cs typeface="BIZ UDPGothic" pitchFamily="34" charset="-120"/>
               </a:rPr>
               <a:t>小さな道案内  /  研究計画</a:t>
             </a:r>
@@ -4917,9 +4942,9 @@
                 <a:solidFill>
                   <a:srgbClr val="024C98"/>
                 </a:solidFill>
-                <a:latin typeface="Noto Sans CJK JP" pitchFamily="34" charset="0"/>
-                <a:ea typeface="Noto Sans CJK JP" pitchFamily="34" charset="-122"/>
-                <a:cs typeface="Noto Sans CJK JP" pitchFamily="34" charset="-120"/>
+                <a:latin typeface="BIZ UDPGothic" pitchFamily="34" charset="0"/>
+                <a:ea typeface="BIZ UDPGothic" pitchFamily="34" charset="-122"/>
+                <a:cs typeface="BIZ UDPGothic" pitchFamily="34" charset="-120"/>
               </a:rPr>
               <a:t>05</a:t>
             </a:r>
@@ -4956,9 +4981,9 @@
                 <a:solidFill>
                   <a:srgbClr val="024C98"/>
                 </a:solidFill>
-                <a:latin typeface="Noto Sans CJK JP" pitchFamily="34" charset="0"/>
-                <a:ea typeface="Noto Sans CJK JP" pitchFamily="34" charset="-122"/>
-                <a:cs typeface="Noto Sans CJK JP" pitchFamily="34" charset="-120"/>
+                <a:latin typeface="BIZ UDPGothic" pitchFamily="34" charset="0"/>
+                <a:ea typeface="BIZ UDPGothic" pitchFamily="34" charset="-122"/>
+                <a:cs typeface="BIZ UDPGothic" pitchFamily="34" charset="-120"/>
               </a:rPr>
               <a:t>小さな仕様が、読み方をそろえる</a:t>
             </a:r>
@@ -5022,9 +5047,9 @@
                 <a:solidFill>
                   <a:srgbClr val="52677B"/>
                 </a:solidFill>
-                <a:latin typeface="Noto Sans CJK JP" pitchFamily="34" charset="0"/>
-                <a:ea typeface="Noto Sans CJK JP" pitchFamily="34" charset="-122"/>
-                <a:cs typeface="Noto Sans CJK JP" pitchFamily="34" charset="-120"/>
+                <a:latin typeface="BIZ UDPGothic" pitchFamily="34" charset="0"/>
+                <a:ea typeface="BIZ UDPGothic" pitchFamily="34" charset="-122"/>
+                <a:cs typeface="BIZ UDPGothic" pitchFamily="34" charset="-120"/>
               </a:rPr>
               <a:t>架空・未実施の研究提案</a:t>
             </a:r>
@@ -5061,9 +5086,9 @@
                 <a:solidFill>
                   <a:srgbClr val="102A43"/>
                 </a:solidFill>
-                <a:latin typeface="Noto Sans CJK JP" pitchFamily="34" charset="0"/>
-                <a:ea typeface="Noto Sans CJK JP" pitchFamily="34" charset="-122"/>
-                <a:cs typeface="Noto Sans CJK JP" pitchFamily="34" charset="-120"/>
+                <a:latin typeface="BIZ UDPGothic" pitchFamily="34" charset="0"/>
+                <a:ea typeface="BIZ UDPGothic" pitchFamily="34" charset="-122"/>
+                <a:cs typeface="BIZ UDPGothic" pitchFamily="34" charset="-120"/>
               </a:rPr>
               <a:t>文字の階層、間隔、明暗差、表記の統一を調整する。</a:t>
             </a:r>
@@ -5125,9 +5150,9 @@
                 <a:solidFill>
                   <a:srgbClr val="FFFFFF"/>
                 </a:solidFill>
-                <a:latin typeface="Noto Sans CJK JP" pitchFamily="34" charset="0"/>
-                <a:ea typeface="Noto Sans CJK JP" pitchFamily="34" charset="-122"/>
-                <a:cs typeface="Noto Sans CJK JP" pitchFamily="34" charset="-120"/>
+                <a:latin typeface="BIZ UDPGothic" pitchFamily="34" charset="0"/>
+                <a:ea typeface="BIZ UDPGothic" pitchFamily="34" charset="-122"/>
+                <a:cs typeface="BIZ UDPGothic" pitchFamily="34" charset="-120"/>
               </a:rPr>
               <a:t>→</a:t>
             </a:r>
@@ -5164,9 +5189,9 @@
                 <a:solidFill>
                   <a:srgbClr val="FFFFFF"/>
                 </a:solidFill>
-                <a:latin typeface="Noto Sans CJK JP" pitchFamily="34" charset="0"/>
-                <a:ea typeface="Noto Sans CJK JP" pitchFamily="34" charset="-122"/>
-                <a:cs typeface="Noto Sans CJK JP" pitchFamily="34" charset="-120"/>
+                <a:latin typeface="BIZ UDPGothic" pitchFamily="34" charset="0"/>
+                <a:ea typeface="BIZ UDPGothic" pitchFamily="34" charset="-122"/>
+                <a:cs typeface="BIZ UDPGothic" pitchFamily="34" charset="-120"/>
               </a:rPr>
               <a:t>受付</a:t>
             </a:r>
@@ -5203,9 +5228,9 @@
                 <a:solidFill>
                   <a:srgbClr val="FFFFFF"/>
                 </a:solidFill>
-                <a:latin typeface="Noto Sans CJK JP" pitchFamily="34" charset="0"/>
-                <a:ea typeface="Noto Sans CJK JP" pitchFamily="34" charset="-122"/>
-                <a:cs typeface="Noto Sans CJK JP" pitchFamily="34" charset="-120"/>
+                <a:latin typeface="BIZ UDPGothic" pitchFamily="34" charset="0"/>
+                <a:ea typeface="BIZ UDPGothic" pitchFamily="34" charset="-122"/>
+                <a:cs typeface="BIZ UDPGothic" pitchFamily="34" charset="-120"/>
               </a:rPr>
               <a:t>青い壁を目印に</a:t>
             </a:r>
@@ -5242,9 +5267,9 @@
                 <a:solidFill>
                   <a:srgbClr val="52677B"/>
                 </a:solidFill>
-                <a:latin typeface="Noto Sans CJK JP" pitchFamily="34" charset="0"/>
-                <a:ea typeface="Noto Sans CJK JP" pitchFamily="34" charset="-122"/>
-                <a:cs typeface="Noto Sans CJK JP" pitchFamily="34" charset="-120"/>
+                <a:latin typeface="BIZ UDPGothic" pitchFamily="34" charset="0"/>
+                <a:ea typeface="BIZ UDPGothic" pitchFamily="34" charset="-122"/>
+                <a:cs typeface="BIZ UDPGothic" pitchFamily="34" charset="-120"/>
               </a:rPr>
               <a:t>矢印</a:t>
             </a:r>
@@ -5305,9 +5330,9 @@
                 <a:solidFill>
                   <a:srgbClr val="52677B"/>
                 </a:solidFill>
-                <a:latin typeface="Noto Sans CJK JP" pitchFamily="34" charset="0"/>
-                <a:ea typeface="Noto Sans CJK JP" pitchFamily="34" charset="-122"/>
-                <a:cs typeface="Noto Sans CJK JP" pitchFamily="34" charset="-120"/>
+                <a:latin typeface="BIZ UDPGothic" pitchFamily="34" charset="0"/>
+                <a:ea typeface="BIZ UDPGothic" pitchFamily="34" charset="-122"/>
+                <a:cs typeface="BIZ UDPGothic" pitchFamily="34" charset="-120"/>
               </a:rPr>
               <a:t>主行き先</a:t>
             </a:r>
@@ -5323,8 +5348,8 @@
         </p:nvSpPr>
         <p:spPr>
           <a:xfrm flipH="1">
-            <a:off x="6537960" y="2788920"/>
-            <a:ext cx="3383280" cy="429768"/>
+            <a:off x="5029200" y="2788920"/>
+            <a:ext cx="4892040" cy="402336"/>
           </a:xfrm>
           <a:prstGeom prst="line">
             <a:avLst/>
@@ -5368,9 +5393,9 @@
                 <a:solidFill>
                   <a:srgbClr val="52677B"/>
                 </a:solidFill>
-                <a:latin typeface="Noto Sans CJK JP" pitchFamily="34" charset="0"/>
-                <a:ea typeface="Noto Sans CJK JP" pitchFamily="34" charset="-122"/>
-                <a:cs typeface="Noto Sans CJK JP" pitchFamily="34" charset="-120"/>
+                <a:latin typeface="BIZ UDPGothic" pitchFamily="34" charset="0"/>
+                <a:ea typeface="BIZ UDPGothic" pitchFamily="34" charset="-122"/>
+                <a:cs typeface="BIZ UDPGothic" pitchFamily="34" charset="-120"/>
               </a:rPr>
               <a:t>補助情報</a:t>
             </a:r>
@@ -5386,8 +5411,8 @@
         </p:nvSpPr>
         <p:spPr>
           <a:xfrm flipH="1" flipV="1">
-            <a:off x="6675120" y="4251960"/>
-            <a:ext cx="3246120" cy="1051560"/>
+            <a:off x="5577840" y="4489704"/>
+            <a:ext cx="4343400" cy="813816"/>
           </a:xfrm>
           <a:prstGeom prst="line">
             <a:avLst/>
@@ -5410,7 +5435,7 @@
         </p:nvSpPr>
         <p:spPr>
           <a:xfrm>
-            <a:off x="731520" y="5166360"/>
+            <a:off x="457200" y="5166360"/>
             <a:ext cx="1463040" cy="320040"/>
           </a:xfrm>
           <a:prstGeom prst="rect">
@@ -5431,11 +5456,11 @@
                 <a:solidFill>
                   <a:srgbClr val="52677B"/>
                 </a:solidFill>
-                <a:latin typeface="Noto Sans CJK JP" pitchFamily="34" charset="0"/>
-                <a:ea typeface="Noto Sans CJK JP" pitchFamily="34" charset="-122"/>
-                <a:cs typeface="Noto Sans CJK JP" pitchFamily="34" charset="-120"/>
-              </a:rPr>
-              <a:t>余白</a:t>
+                <a:latin typeface="BIZ UDPGothic" pitchFamily="34" charset="0"/>
+                <a:ea typeface="BIZ UDPGothic" pitchFamily="34" charset="-122"/>
+                <a:cs typeface="BIZ UDPGothic" pitchFamily="34" charset="-120"/>
+              </a:rPr>
+              <a:t>内側の余白</a:t>
             </a:r>
             <a:endParaRPr lang="en-US" sz="1700" dirty="0"/>
           </a:p>
@@ -5449,8 +5474,8 @@
         </p:nvSpPr>
         <p:spPr>
           <a:xfrm flipV="1">
-            <a:off x="2011680" y="4526280"/>
-            <a:ext cx="502920" cy="777240"/>
+            <a:off x="2011680" y="4663440"/>
+            <a:ext cx="667512" cy="640080"/>
           </a:xfrm>
           <a:prstGeom prst="line">
             <a:avLst/>
@@ -5494,9 +5519,9 @@
                 <a:solidFill>
                   <a:srgbClr val="52677B"/>
                 </a:solidFill>
-                <a:latin typeface="Noto Sans CJK JP" pitchFamily="34" charset="0"/>
-                <a:ea typeface="Noto Sans CJK JP" pitchFamily="34" charset="-122"/>
-                <a:cs typeface="Noto Sans CJK JP" pitchFamily="34" charset="-120"/>
+                <a:latin typeface="BIZ UDPGothic" pitchFamily="34" charset="0"/>
+                <a:ea typeface="BIZ UDPGothic" pitchFamily="34" charset="-122"/>
+                <a:cs typeface="BIZ UDPGothic" pitchFamily="34" charset="-120"/>
               </a:rPr>
               <a:t>背景</a:t>
             </a:r>
@@ -5557,9 +5582,9 @@
                 <a:solidFill>
                   <a:srgbClr val="024C98"/>
                 </a:solidFill>
-                <a:latin typeface="Noto Sans CJK JP" pitchFamily="34" charset="0"/>
-                <a:ea typeface="Noto Sans CJK JP" pitchFamily="34" charset="-122"/>
-                <a:cs typeface="Noto Sans CJK JP" pitchFamily="34" charset="-120"/>
+                <a:latin typeface="BIZ UDPGothic" pitchFamily="34" charset="0"/>
+                <a:ea typeface="BIZ UDPGothic" pitchFamily="34" charset="-122"/>
+                <a:cs typeface="BIZ UDPGothic" pitchFamily="34" charset="-120"/>
               </a:rPr>
               <a:t>色だけに頼らず、形・文字・目印を併用する。</a:t>
             </a:r>
@@ -5596,15 +5621,84 @@
                 <a:solidFill>
                   <a:srgbClr val="52677B"/>
                 </a:solidFill>
-                <a:latin typeface="Noto Sans CJK JP" pitchFamily="34" charset="0"/>
-                <a:ea typeface="Noto Sans CJK JP" pitchFamily="34" charset="-122"/>
-                <a:cs typeface="Noto Sans CJK JP" pitchFamily="34" charset="-120"/>
+                <a:latin typeface="BIZ UDPGothic" pitchFamily="34" charset="0"/>
+                <a:ea typeface="BIZ UDPGothic" pitchFamily="34" charset="-122"/>
+                <a:cs typeface="BIZ UDPGothic" pitchFamily="34" charset="-120"/>
               </a:rPr>
               <a:t>要検証：距離・照明・視力条件</a:t>
             </a:r>
             <a:endParaRPr lang="en-US" sz="1300" dirty="0"/>
           </a:p>
         </p:txBody>
+      </p:sp>
+      <p:sp>
+        <p:nvSpPr>
+          <p:cNvPr id="25" name="PADDING_dimension_0"/>
+          <p:cNvSpPr/>
+          <p:nvPr/>
+        </p:nvSpPr>
+        <p:spPr>
+          <a:xfrm>
+            <a:off x="2423160" y="4663440"/>
+            <a:ext cx="502920" cy="0"/>
+          </a:xfrm>
+          <a:prstGeom prst="line">
+            <a:avLst/>
+          </a:prstGeom>
+          <a:noFill/>
+          <a:ln w="15240">
+            <a:solidFill>
+              <a:srgbClr val="FFFFFF"/>
+            </a:solidFill>
+            <a:prstDash val="solid"/>
+          </a:ln>
+        </p:spPr>
+      </p:sp>
+      <p:sp>
+        <p:nvSpPr>
+          <p:cNvPr id="26" name="PADDING_dimension_1"/>
+          <p:cNvSpPr/>
+          <p:nvPr/>
+        </p:nvSpPr>
+        <p:spPr>
+          <a:xfrm>
+            <a:off x="2423160" y="4553712"/>
+            <a:ext cx="0" cy="201168"/>
+          </a:xfrm>
+          <a:prstGeom prst="line">
+            <a:avLst/>
+          </a:prstGeom>
+          <a:noFill/>
+          <a:ln w="15240">
+            <a:solidFill>
+              <a:srgbClr val="FFFFFF"/>
+            </a:solidFill>
+            <a:prstDash val="solid"/>
+          </a:ln>
+        </p:spPr>
+      </p:sp>
+      <p:sp>
+        <p:nvSpPr>
+          <p:cNvPr id="27" name="PADDING_dimension_2"/>
+          <p:cNvSpPr/>
+          <p:nvPr/>
+        </p:nvSpPr>
+        <p:spPr>
+          <a:xfrm>
+            <a:off x="2926080" y="4553712"/>
+            <a:ext cx="0" cy="201168"/>
+          </a:xfrm>
+          <a:prstGeom prst="line">
+            <a:avLst/>
+          </a:prstGeom>
+          <a:noFill/>
+          <a:ln w="15240">
+            <a:solidFill>
+              <a:srgbClr val="FFFFFF"/>
+            </a:solidFill>
+            <a:prstDash val="solid"/>
+          </a:ln>
+        </p:spPr>
       </p:sp>
     </p:spTree>
   </p:cSld>
@@ -5667,9 +5761,9 @@
                 <a:solidFill>
                   <a:srgbClr val="52677B"/>
                 </a:solidFill>
-                <a:latin typeface="Noto Sans CJK JP" pitchFamily="34" charset="0"/>
-                <a:ea typeface="Noto Sans CJK JP" pitchFamily="34" charset="-122"/>
-                <a:cs typeface="Noto Sans CJK JP" pitchFamily="34" charset="-120"/>
+                <a:latin typeface="BIZ UDPGothic" pitchFamily="34" charset="0"/>
+                <a:ea typeface="BIZ UDPGothic" pitchFamily="34" charset="-122"/>
+                <a:cs typeface="BIZ UDPGothic" pitchFamily="34" charset="-120"/>
               </a:rPr>
               <a:t>小さな道案内  /  研究計画</a:t>
             </a:r>
@@ -5706,9 +5800,9 @@
                 <a:solidFill>
                   <a:srgbClr val="024C98"/>
                 </a:solidFill>
-                <a:latin typeface="Noto Sans CJK JP" pitchFamily="34" charset="0"/>
-                <a:ea typeface="Noto Sans CJK JP" pitchFamily="34" charset="-122"/>
-                <a:cs typeface="Noto Sans CJK JP" pitchFamily="34" charset="-120"/>
+                <a:latin typeface="BIZ UDPGothic" pitchFamily="34" charset="0"/>
+                <a:ea typeface="BIZ UDPGothic" pitchFamily="34" charset="-122"/>
+                <a:cs typeface="BIZ UDPGothic" pitchFamily="34" charset="-120"/>
               </a:rPr>
               <a:t>06</a:t>
             </a:r>
@@ -5745,9 +5839,9 @@
                 <a:solidFill>
                   <a:srgbClr val="024C98"/>
                 </a:solidFill>
-                <a:latin typeface="Noto Sans CJK JP" pitchFamily="34" charset="0"/>
-                <a:ea typeface="Noto Sans CJK JP" pitchFamily="34" charset="-122"/>
-                <a:cs typeface="Noto Sans CJK JP" pitchFamily="34" charset="-120"/>
+                <a:latin typeface="BIZ UDPGothic" pitchFamily="34" charset="0"/>
+                <a:ea typeface="BIZ UDPGothic" pitchFamily="34" charset="-122"/>
+                <a:cs typeface="BIZ UDPGothic" pitchFamily="34" charset="-120"/>
               </a:rPr>
               <a:t>評価は、迷った場所を記録する</a:t>
             </a:r>
@@ -5811,9 +5905,9 @@
                 <a:solidFill>
                   <a:srgbClr val="52677B"/>
                 </a:solidFill>
-                <a:latin typeface="Noto Sans CJK JP" pitchFamily="34" charset="0"/>
-                <a:ea typeface="Noto Sans CJK JP" pitchFamily="34" charset="-122"/>
-                <a:cs typeface="Noto Sans CJK JP" pitchFamily="34" charset="-120"/>
+                <a:latin typeface="BIZ UDPGothic" pitchFamily="34" charset="0"/>
+                <a:ea typeface="BIZ UDPGothic" pitchFamily="34" charset="-122"/>
+                <a:cs typeface="BIZ UDPGothic" pitchFamily="34" charset="-120"/>
               </a:rPr>
               <a:t>架空・未実施の研究提案</a:t>
             </a:r>
@@ -5850,9 +5944,9 @@
                 <a:solidFill>
                   <a:srgbClr val="102A43"/>
                 </a:solidFill>
-                <a:latin typeface="Noto Sans CJK JP" pitchFamily="34" charset="0"/>
-                <a:ea typeface="Noto Sans CJK JP" pitchFamily="34" charset="-122"/>
-                <a:cs typeface="Noto Sans CJK JP" pitchFamily="34" charset="-120"/>
+                <a:latin typeface="BIZ UDPGothic" pitchFamily="34" charset="0"/>
+                <a:ea typeface="BIZ UDPGothic" pitchFamily="34" charset="-122"/>
+                <a:cs typeface="BIZ UDPGothic" pitchFamily="34" charset="-120"/>
               </a:rPr>
               <a:t>机上レビュー後、模擬経路で複数案を比較する計画。</a:t>
             </a:r>
@@ -6097,9 +6191,9 @@
                 <a:solidFill>
                   <a:srgbClr val="102A43"/>
                 </a:solidFill>
-                <a:latin typeface="Noto Sans CJK JP" pitchFamily="34" charset="0"/>
-                <a:ea typeface="Noto Sans CJK JP" pitchFamily="34" charset="-122"/>
-                <a:cs typeface="Noto Sans CJK JP" pitchFamily="34" charset="-120"/>
+                <a:latin typeface="BIZ UDPGothic" pitchFamily="34" charset="0"/>
+                <a:ea typeface="BIZ UDPGothic" pitchFamily="34" charset="-122"/>
+                <a:cs typeface="BIZ UDPGothic" pitchFamily="34" charset="-120"/>
               </a:rPr>
               <a:t>立ち止まり</a:t>
             </a:r>
@@ -6136,9 +6230,9 @@
                 <a:solidFill>
                   <a:srgbClr val="102A43"/>
                 </a:solidFill>
-                <a:latin typeface="Noto Sans CJK JP" pitchFamily="34" charset="0"/>
-                <a:ea typeface="Noto Sans CJK JP" pitchFamily="34" charset="-122"/>
-                <a:cs typeface="Noto Sans CJK JP" pitchFamily="34" charset="-120"/>
+                <a:latin typeface="BIZ UDPGothic" pitchFamily="34" charset="0"/>
+                <a:ea typeface="BIZ UDPGothic" pitchFamily="34" charset="-122"/>
+                <a:cs typeface="BIZ UDPGothic" pitchFamily="34" charset="-120"/>
               </a:rPr>
               <a:t>戻り</a:t>
             </a:r>
@@ -6175,9 +6269,9 @@
                 <a:solidFill>
                   <a:srgbClr val="102A43"/>
                 </a:solidFill>
-                <a:latin typeface="Noto Sans CJK JP" pitchFamily="34" charset="0"/>
-                <a:ea typeface="Noto Sans CJK JP" pitchFamily="34" charset="-122"/>
-                <a:cs typeface="Noto Sans CJK JP" pitchFamily="34" charset="-120"/>
+                <a:latin typeface="BIZ UDPGothic" pitchFamily="34" charset="0"/>
+                <a:ea typeface="BIZ UDPGothic" pitchFamily="34" charset="-122"/>
+                <a:cs typeface="BIZ UDPGothic" pitchFamily="34" charset="-120"/>
               </a:rPr>
               <a:t>分岐選択</a:t>
             </a:r>
@@ -6241,9 +6335,9 @@
                 <a:solidFill>
                   <a:srgbClr val="1D5EA7"/>
                 </a:solidFill>
-                <a:latin typeface="Noto Sans CJK JP" pitchFamily="34" charset="0"/>
-                <a:ea typeface="Noto Sans CJK JP" pitchFamily="34" charset="-122"/>
-                <a:cs typeface="Noto Sans CJK JP" pitchFamily="34" charset="-120"/>
+                <a:latin typeface="BIZ UDPGothic" pitchFamily="34" charset="0"/>
+                <a:ea typeface="BIZ UDPGothic" pitchFamily="34" charset="-122"/>
+                <a:cs typeface="BIZ UDPGothic" pitchFamily="34" charset="-120"/>
               </a:rPr>
               <a:t>1</a:t>
             </a:r>
@@ -6280,9 +6374,9 @@
                 <a:solidFill>
                   <a:srgbClr val="024C98"/>
                 </a:solidFill>
-                <a:latin typeface="Noto Sans CJK JP" pitchFamily="34" charset="0"/>
-                <a:ea typeface="Noto Sans CJK JP" pitchFamily="34" charset="-122"/>
-                <a:cs typeface="Noto Sans CJK JP" pitchFamily="34" charset="-120"/>
+                <a:latin typeface="BIZ UDPGothic" pitchFamily="34" charset="0"/>
+                <a:ea typeface="BIZ UDPGothic" pitchFamily="34" charset="-122"/>
+                <a:cs typeface="BIZ UDPGothic" pitchFamily="34" charset="-120"/>
               </a:rPr>
               <a:t>事前説明</a:t>
             </a:r>
@@ -6371,9 +6465,9 @@
                 <a:solidFill>
                   <a:srgbClr val="1D5EA7"/>
                 </a:solidFill>
-                <a:latin typeface="Noto Sans CJK JP" pitchFamily="34" charset="0"/>
-                <a:ea typeface="Noto Sans CJK JP" pitchFamily="34" charset="-122"/>
-                <a:cs typeface="Noto Sans CJK JP" pitchFamily="34" charset="-120"/>
+                <a:latin typeface="BIZ UDPGothic" pitchFamily="34" charset="0"/>
+                <a:ea typeface="BIZ UDPGothic" pitchFamily="34" charset="-122"/>
+                <a:cs typeface="BIZ UDPGothic" pitchFamily="34" charset="-120"/>
               </a:rPr>
               <a:t>2</a:t>
             </a:r>
@@ -6410,9 +6504,9 @@
                 <a:solidFill>
                   <a:srgbClr val="024C98"/>
                 </a:solidFill>
-                <a:latin typeface="Noto Sans CJK JP" pitchFamily="34" charset="0"/>
-                <a:ea typeface="Noto Sans CJK JP" pitchFamily="34" charset="-122"/>
-                <a:cs typeface="Noto Sans CJK JP" pitchFamily="34" charset="-120"/>
+                <a:latin typeface="BIZ UDPGothic" pitchFamily="34" charset="0"/>
+                <a:ea typeface="BIZ UDPGothic" pitchFamily="34" charset="-122"/>
+                <a:cs typeface="BIZ UDPGothic" pitchFamily="34" charset="-120"/>
               </a:rPr>
               <a:t>移動</a:t>
             </a:r>
@@ -6501,9 +6595,9 @@
                 <a:solidFill>
                   <a:srgbClr val="1D5EA7"/>
                 </a:solidFill>
-                <a:latin typeface="Noto Sans CJK JP" pitchFamily="34" charset="0"/>
-                <a:ea typeface="Noto Sans CJK JP" pitchFamily="34" charset="-122"/>
-                <a:cs typeface="Noto Sans CJK JP" pitchFamily="34" charset="-120"/>
+                <a:latin typeface="BIZ UDPGothic" pitchFamily="34" charset="0"/>
+                <a:ea typeface="BIZ UDPGothic" pitchFamily="34" charset="-122"/>
+                <a:cs typeface="BIZ UDPGothic" pitchFamily="34" charset="-120"/>
               </a:rPr>
               <a:t>3</a:t>
             </a:r>
@@ -6540,9 +6634,9 @@
                 <a:solidFill>
                   <a:srgbClr val="024C98"/>
                 </a:solidFill>
-                <a:latin typeface="Noto Sans CJK JP" pitchFamily="34" charset="0"/>
-                <a:ea typeface="Noto Sans CJK JP" pitchFamily="34" charset="-122"/>
-                <a:cs typeface="Noto Sans CJK JP" pitchFamily="34" charset="-120"/>
+                <a:latin typeface="BIZ UDPGothic" pitchFamily="34" charset="0"/>
+                <a:ea typeface="BIZ UDPGothic" pitchFamily="34" charset="-122"/>
+                <a:cs typeface="BIZ UDPGothic" pitchFamily="34" charset="-120"/>
               </a:rPr>
               <a:t>振り返り</a:t>
             </a:r>
@@ -6558,8 +6652,8 @@
         </p:nvSpPr>
         <p:spPr>
           <a:xfrm>
-            <a:off x="777240" y="2496312"/>
-            <a:ext cx="6492240" cy="685800"/>
+            <a:off x="777240" y="2432304"/>
+            <a:ext cx="10698480" cy="274320"/>
           </a:xfrm>
           <a:prstGeom prst="rect">
             <a:avLst/>
@@ -6579,28 +6673,11 @@
                 <a:solidFill>
                   <a:srgbClr val="52677B"/>
                 </a:solidFill>
-                <a:latin typeface="Noto Sans CJK JP" pitchFamily="34" charset="0"/>
-                <a:ea typeface="Noto Sans CJK JP" pitchFamily="34" charset="-122"/>
-                <a:cs typeface="Noto Sans CJK JP" pitchFamily="34" charset="-120"/>
-              </a:rPr>
-              <a:t>探した位置・誤った分岐・到着の確信も記録。</a:t>
-            </a:r>
-            <a:endParaRPr lang="en-US" sz="1600" dirty="0"/>
-          </a:p>
-          <a:p>
-            <a:pPr indent="0" marL="0">
-              <a:buNone/>
-            </a:pPr>
-            <a:r>
-              <a:rPr lang="en-US" sz="1600" dirty="0">
-                <a:solidFill>
-                  <a:srgbClr val="52677B"/>
-                </a:solidFill>
-                <a:latin typeface="Noto Sans CJK JP" pitchFamily="34" charset="0"/>
-                <a:ea typeface="Noto Sans CJK JP" pitchFamily="34" charset="-122"/>
-                <a:cs typeface="Noto Sans CJK JP" pitchFamily="34" charset="-120"/>
-              </a:rPr>
-              <a:t>速さだけを成功の基準にしない。</a:t>
+                <a:latin typeface="BIZ UDPGothic" pitchFamily="34" charset="0"/>
+                <a:ea typeface="BIZ UDPGothic" pitchFamily="34" charset="-122"/>
+                <a:cs typeface="BIZ UDPGothic" pitchFamily="34" charset="-120"/>
+              </a:rPr>
+              <a:t>記録：探した位置・誤った分岐・到着の確信（速さだけで判断しない）</a:t>
             </a:r>
             <a:endParaRPr lang="en-US" sz="1600" dirty="0"/>
           </a:p>
@@ -6667,9 +6744,9 @@
                 <a:solidFill>
                   <a:srgbClr val="52677B"/>
                 </a:solidFill>
-                <a:latin typeface="Noto Sans CJK JP" pitchFamily="34" charset="0"/>
-                <a:ea typeface="Noto Sans CJK JP" pitchFamily="34" charset="-122"/>
-                <a:cs typeface="Noto Sans CJK JP" pitchFamily="34" charset="-120"/>
+                <a:latin typeface="BIZ UDPGothic" pitchFamily="34" charset="0"/>
+                <a:ea typeface="BIZ UDPGothic" pitchFamily="34" charset="-122"/>
+                <a:cs typeface="BIZ UDPGothic" pitchFamily="34" charset="-120"/>
               </a:rPr>
               <a:t>小さな道案内  /  研究計画</a:t>
             </a:r>
@@ -6706,9 +6783,9 @@
                 <a:solidFill>
                   <a:srgbClr val="024C98"/>
                 </a:solidFill>
-                <a:latin typeface="Noto Sans CJK JP" pitchFamily="34" charset="0"/>
-                <a:ea typeface="Noto Sans CJK JP" pitchFamily="34" charset="-122"/>
-                <a:cs typeface="Noto Sans CJK JP" pitchFamily="34" charset="-120"/>
+                <a:latin typeface="BIZ UDPGothic" pitchFamily="34" charset="0"/>
+                <a:ea typeface="BIZ UDPGothic" pitchFamily="34" charset="-122"/>
+                <a:cs typeface="BIZ UDPGothic" pitchFamily="34" charset="-120"/>
               </a:rPr>
               <a:t>07</a:t>
             </a:r>
@@ -6745,9 +6822,9 @@
                 <a:solidFill>
                   <a:srgbClr val="024C98"/>
                 </a:solidFill>
-                <a:latin typeface="Noto Sans CJK JP" pitchFamily="34" charset="0"/>
-                <a:ea typeface="Noto Sans CJK JP" pitchFamily="34" charset="-122"/>
-                <a:cs typeface="Noto Sans CJK JP" pitchFamily="34" charset="-120"/>
+                <a:latin typeface="BIZ UDPGothic" pitchFamily="34" charset="0"/>
+                <a:ea typeface="BIZ UDPGothic" pitchFamily="34" charset="-122"/>
+                <a:cs typeface="BIZ UDPGothic" pitchFamily="34" charset="-120"/>
               </a:rPr>
               <a:t>万能な案内にはならない</a:t>
             </a:r>
@@ -6811,9 +6888,9 @@
                 <a:solidFill>
                   <a:srgbClr val="52677B"/>
                 </a:solidFill>
-                <a:latin typeface="Noto Sans CJK JP" pitchFamily="34" charset="0"/>
-                <a:ea typeface="Noto Sans CJK JP" pitchFamily="34" charset="-122"/>
-                <a:cs typeface="Noto Sans CJK JP" pitchFamily="34" charset="-120"/>
+                <a:latin typeface="BIZ UDPGothic" pitchFamily="34" charset="0"/>
+                <a:ea typeface="BIZ UDPGothic" pitchFamily="34" charset="-122"/>
+                <a:cs typeface="BIZ UDPGothic" pitchFamily="34" charset="-120"/>
               </a:rPr>
               <a:t>架空・未実施の研究提案</a:t>
             </a:r>
@@ -6850,9 +6927,9 @@
                 <a:solidFill>
                   <a:srgbClr val="102A43"/>
                 </a:solidFill>
-                <a:latin typeface="Noto Sans CJK JP" pitchFamily="34" charset="0"/>
-                <a:ea typeface="Noto Sans CJK JP" pitchFamily="34" charset="-122"/>
-                <a:cs typeface="Noto Sans CJK JP" pitchFamily="34" charset="-120"/>
+                <a:latin typeface="BIZ UDPGothic" pitchFamily="34" charset="0"/>
+                <a:ea typeface="BIZ UDPGothic" pitchFamily="34" charset="-122"/>
+                <a:cs typeface="BIZ UDPGothic" pitchFamily="34" charset="-120"/>
               </a:rPr>
               <a:t>模擬環境の評価だけで、実施設への適用は保証できない。</a:t>
             </a:r>
@@ -6862,7 +6939,385 @@
       </p:sp>
       <p:sp>
         <p:nvSpPr>
-          <p:cNvPr id="9" name="shape-137"/>
+          <p:cNvPr id="9" name="line-137"/>
+          <p:cNvSpPr/>
+          <p:nvPr/>
+        </p:nvSpPr>
+        <p:spPr>
+          <a:xfrm flipH="1" flipV="1">
+            <a:off x="2377440" y="3090672"/>
+            <a:ext cx="3749040" cy="1133856"/>
+          </a:xfrm>
+          <a:prstGeom prst="line">
+            <a:avLst/>
+          </a:prstGeom>
+          <a:noFill/>
+          <a:ln w="20320">
+            <a:solidFill>
+              <a:srgbClr val="ADC2D3"/>
+            </a:solidFill>
+            <a:prstDash val="solid"/>
+            <a:tailEnd type="none"/>
+          </a:ln>
+        </p:spPr>
+      </p:sp>
+      <p:sp>
+        <p:nvSpPr>
+          <p:cNvPr id="10" name="text-138"/>
+          <p:cNvSpPr/>
+          <p:nvPr/>
+        </p:nvSpPr>
+        <p:spPr>
+          <a:xfrm>
+            <a:off x="1920240" y="2907792"/>
+            <a:ext cx="2194560" cy="411480"/>
+          </a:xfrm>
+          <a:prstGeom prst="rect">
+            <a:avLst/>
+          </a:prstGeom>
+          <a:noFill/>
+          <a:ln/>
+        </p:spPr>
+        <p:txBody>
+          <a:bodyPr wrap="square" lIns="0" tIns="0" rIns="0" bIns="0" rtlCol="0" anchor="ctr"/>
+          <a:lstStyle/>
+          <a:p>
+            <a:pPr indent="0" marL="0">
+              <a:buNone/>
+            </a:pPr>
+            <a:r>
+              <a:rPr lang="en-US" sz="2300" b="1" dirty="0">
+                <a:solidFill>
+                  <a:srgbClr val="024C98"/>
+                </a:solidFill>
+                <a:latin typeface="BIZ UDPGothic" pitchFamily="34" charset="0"/>
+                <a:ea typeface="BIZ UDPGothic" pitchFamily="34" charset="-122"/>
+                <a:cs typeface="BIZ UDPGothic" pitchFamily="34" charset="-120"/>
+              </a:rPr>
+              <a:t>混雑</a:t>
+            </a:r>
+            <a:endParaRPr lang="en-US" sz="2300" dirty="0"/>
+          </a:p>
+        </p:txBody>
+      </p:sp>
+      <p:sp>
+        <p:nvSpPr>
+          <p:cNvPr id="11" name="line-139"/>
+          <p:cNvSpPr/>
+          <p:nvPr/>
+        </p:nvSpPr>
+        <p:spPr>
+          <a:xfrm flipH="1" flipV="1">
+            <a:off x="6016752" y="2953512"/>
+            <a:ext cx="109728" cy="1271016"/>
+          </a:xfrm>
+          <a:prstGeom prst="line">
+            <a:avLst/>
+          </a:prstGeom>
+          <a:noFill/>
+          <a:ln w="20320">
+            <a:solidFill>
+              <a:srgbClr val="ADC2D3"/>
+            </a:solidFill>
+            <a:prstDash val="solid"/>
+            <a:tailEnd type="none"/>
+          </a:ln>
+        </p:spPr>
+      </p:sp>
+      <p:sp>
+        <p:nvSpPr>
+          <p:cNvPr id="12" name="text-140"/>
+          <p:cNvSpPr/>
+          <p:nvPr/>
+        </p:nvSpPr>
+        <p:spPr>
+          <a:xfrm>
+            <a:off x="5559552" y="2770632"/>
+            <a:ext cx="2194560" cy="411480"/>
+          </a:xfrm>
+          <a:prstGeom prst="rect">
+            <a:avLst/>
+          </a:prstGeom>
+          <a:noFill/>
+          <a:ln/>
+        </p:spPr>
+        <p:txBody>
+          <a:bodyPr wrap="square" lIns="0" tIns="0" rIns="0" bIns="0" rtlCol="0" anchor="ctr"/>
+          <a:lstStyle/>
+          <a:p>
+            <a:pPr indent="0" marL="0">
+              <a:buNone/>
+            </a:pPr>
+            <a:r>
+              <a:rPr lang="en-US" sz="2300" b="1" dirty="0">
+                <a:solidFill>
+                  <a:srgbClr val="024C98"/>
+                </a:solidFill>
+                <a:latin typeface="BIZ UDPGothic" pitchFamily="34" charset="0"/>
+                <a:ea typeface="BIZ UDPGothic" pitchFamily="34" charset="-122"/>
+                <a:cs typeface="BIZ UDPGothic" pitchFamily="34" charset="-120"/>
+              </a:rPr>
+              <a:t>照明</a:t>
+            </a:r>
+            <a:endParaRPr lang="en-US" sz="2300" dirty="0"/>
+          </a:p>
+        </p:txBody>
+      </p:sp>
+      <p:sp>
+        <p:nvSpPr>
+          <p:cNvPr id="13" name="line-141"/>
+          <p:cNvSpPr/>
+          <p:nvPr/>
+        </p:nvSpPr>
+        <p:spPr>
+          <a:xfrm flipV="1">
+            <a:off x="6126480" y="3090672"/>
+            <a:ext cx="3657600" cy="1133856"/>
+          </a:xfrm>
+          <a:prstGeom prst="line">
+            <a:avLst/>
+          </a:prstGeom>
+          <a:noFill/>
+          <a:ln w="20320">
+            <a:solidFill>
+              <a:srgbClr val="ADC2D3"/>
+            </a:solidFill>
+            <a:prstDash val="solid"/>
+            <a:tailEnd type="none"/>
+          </a:ln>
+        </p:spPr>
+      </p:sp>
+      <p:sp>
+        <p:nvSpPr>
+          <p:cNvPr id="14" name="text-142"/>
+          <p:cNvSpPr/>
+          <p:nvPr/>
+        </p:nvSpPr>
+        <p:spPr>
+          <a:xfrm>
+            <a:off x="9326880" y="2907792"/>
+            <a:ext cx="2194560" cy="411480"/>
+          </a:xfrm>
+          <a:prstGeom prst="rect">
+            <a:avLst/>
+          </a:prstGeom>
+          <a:noFill/>
+          <a:ln/>
+        </p:spPr>
+        <p:txBody>
+          <a:bodyPr wrap="square" lIns="0" tIns="0" rIns="0" bIns="0" rtlCol="0" anchor="ctr"/>
+          <a:lstStyle/>
+          <a:p>
+            <a:pPr indent="0" marL="0">
+              <a:buNone/>
+            </a:pPr>
+            <a:r>
+              <a:rPr lang="en-US" sz="2300" b="1" dirty="0">
+                <a:solidFill>
+                  <a:srgbClr val="024C98"/>
+                </a:solidFill>
+                <a:latin typeface="BIZ UDPGothic" pitchFamily="34" charset="0"/>
+                <a:ea typeface="BIZ UDPGothic" pitchFamily="34" charset="-122"/>
+                <a:cs typeface="BIZ UDPGothic" pitchFamily="34" charset="-120"/>
+              </a:rPr>
+              <a:t>言語</a:t>
+            </a:r>
+            <a:endParaRPr lang="en-US" sz="2300" dirty="0"/>
+          </a:p>
+        </p:txBody>
+      </p:sp>
+      <p:sp>
+        <p:nvSpPr>
+          <p:cNvPr id="15" name="line-143"/>
+          <p:cNvSpPr/>
+          <p:nvPr/>
+        </p:nvSpPr>
+        <p:spPr>
+          <a:xfrm flipH="1">
+            <a:off x="2377440" y="4224528"/>
+            <a:ext cx="3749040" cy="1170432"/>
+          </a:xfrm>
+          <a:prstGeom prst="line">
+            <a:avLst/>
+          </a:prstGeom>
+          <a:noFill/>
+          <a:ln w="20320">
+            <a:solidFill>
+              <a:srgbClr val="ADC2D3"/>
+            </a:solidFill>
+            <a:prstDash val="solid"/>
+            <a:tailEnd type="none"/>
+          </a:ln>
+        </p:spPr>
+      </p:sp>
+      <p:sp>
+        <p:nvSpPr>
+          <p:cNvPr id="16" name="text-144"/>
+          <p:cNvSpPr/>
+          <p:nvPr/>
+        </p:nvSpPr>
+        <p:spPr>
+          <a:xfrm>
+            <a:off x="1920240" y="5212080"/>
+            <a:ext cx="2194560" cy="411480"/>
+          </a:xfrm>
+          <a:prstGeom prst="rect">
+            <a:avLst/>
+          </a:prstGeom>
+          <a:noFill/>
+          <a:ln/>
+        </p:spPr>
+        <p:txBody>
+          <a:bodyPr wrap="square" lIns="0" tIns="0" rIns="0" bIns="0" rtlCol="0" anchor="ctr"/>
+          <a:lstStyle/>
+          <a:p>
+            <a:pPr indent="0" marL="0">
+              <a:buNone/>
+            </a:pPr>
+            <a:r>
+              <a:rPr lang="en-US" sz="2300" b="1" dirty="0">
+                <a:solidFill>
+                  <a:srgbClr val="024C98"/>
+                </a:solidFill>
+                <a:latin typeface="BIZ UDPGothic" pitchFamily="34" charset="0"/>
+                <a:ea typeface="BIZ UDPGothic" pitchFamily="34" charset="-122"/>
+                <a:cs typeface="BIZ UDPGothic" pitchFamily="34" charset="-120"/>
+              </a:rPr>
+              <a:t>視覚</a:t>
+            </a:r>
+            <a:endParaRPr lang="en-US" sz="2300" dirty="0"/>
+          </a:p>
+        </p:txBody>
+      </p:sp>
+      <p:sp>
+        <p:nvSpPr>
+          <p:cNvPr id="17" name="line-145"/>
+          <p:cNvSpPr/>
+          <p:nvPr/>
+        </p:nvSpPr>
+        <p:spPr>
+          <a:xfrm flipH="1">
+            <a:off x="6016752" y="4224528"/>
+            <a:ext cx="109728" cy="1170432"/>
+          </a:xfrm>
+          <a:prstGeom prst="line">
+            <a:avLst/>
+          </a:prstGeom>
+          <a:noFill/>
+          <a:ln w="20320">
+            <a:solidFill>
+              <a:srgbClr val="ADC2D3"/>
+            </a:solidFill>
+            <a:prstDash val="solid"/>
+            <a:tailEnd type="none"/>
+          </a:ln>
+        </p:spPr>
+      </p:sp>
+      <p:sp>
+        <p:nvSpPr>
+          <p:cNvPr id="18" name="text-146"/>
+          <p:cNvSpPr/>
+          <p:nvPr/>
+        </p:nvSpPr>
+        <p:spPr>
+          <a:xfrm>
+            <a:off x="5559552" y="5212080"/>
+            <a:ext cx="2194560" cy="411480"/>
+          </a:xfrm>
+          <a:prstGeom prst="rect">
+            <a:avLst/>
+          </a:prstGeom>
+          <a:noFill/>
+          <a:ln/>
+        </p:spPr>
+        <p:txBody>
+          <a:bodyPr wrap="square" lIns="0" tIns="0" rIns="0" bIns="0" rtlCol="0" anchor="ctr"/>
+          <a:lstStyle/>
+          <a:p>
+            <a:pPr indent="0" marL="0">
+              <a:buNone/>
+            </a:pPr>
+            <a:r>
+              <a:rPr lang="en-US" sz="2300" b="1" dirty="0">
+                <a:solidFill>
+                  <a:srgbClr val="024C98"/>
+                </a:solidFill>
+                <a:latin typeface="BIZ UDPGothic" pitchFamily="34" charset="0"/>
+                <a:ea typeface="BIZ UDPGothic" pitchFamily="34" charset="-122"/>
+                <a:cs typeface="BIZ UDPGothic" pitchFamily="34" charset="-120"/>
+              </a:rPr>
+              <a:t>移動</a:t>
+            </a:r>
+            <a:endParaRPr lang="en-US" sz="2300" dirty="0"/>
+          </a:p>
+        </p:txBody>
+      </p:sp>
+      <p:sp>
+        <p:nvSpPr>
+          <p:cNvPr id="19" name="line-147"/>
+          <p:cNvSpPr/>
+          <p:nvPr/>
+        </p:nvSpPr>
+        <p:spPr>
+          <a:xfrm>
+            <a:off x="6126480" y="4224528"/>
+            <a:ext cx="3474720" cy="1170432"/>
+          </a:xfrm>
+          <a:prstGeom prst="line">
+            <a:avLst/>
+          </a:prstGeom>
+          <a:noFill/>
+          <a:ln w="20320">
+            <a:solidFill>
+              <a:srgbClr val="ADC2D3"/>
+            </a:solidFill>
+            <a:prstDash val="solid"/>
+            <a:tailEnd type="none"/>
+          </a:ln>
+        </p:spPr>
+      </p:sp>
+      <p:sp>
+        <p:nvSpPr>
+          <p:cNvPr id="20" name="text-148"/>
+          <p:cNvSpPr/>
+          <p:nvPr/>
+        </p:nvSpPr>
+        <p:spPr>
+          <a:xfrm>
+            <a:off x="9144000" y="5212080"/>
+            <a:ext cx="2194560" cy="411480"/>
+          </a:xfrm>
+          <a:prstGeom prst="rect">
+            <a:avLst/>
+          </a:prstGeom>
+          <a:noFill/>
+          <a:ln/>
+        </p:spPr>
+        <p:txBody>
+          <a:bodyPr wrap="square" lIns="0" tIns="0" rIns="0" bIns="0" rtlCol="0" anchor="ctr"/>
+          <a:lstStyle/>
+          <a:p>
+            <a:pPr indent="0" marL="0">
+              <a:buNone/>
+            </a:pPr>
+            <a:r>
+              <a:rPr lang="en-US" sz="2300" b="1" dirty="0">
+                <a:solidFill>
+                  <a:srgbClr val="024C98"/>
+                </a:solidFill>
+                <a:latin typeface="BIZ UDPGothic" pitchFamily="34" charset="0"/>
+                <a:ea typeface="BIZ UDPGothic" pitchFamily="34" charset="-122"/>
+                <a:cs typeface="BIZ UDPGothic" pitchFamily="34" charset="-120"/>
+              </a:rPr>
+              <a:t>他の掲示</a:t>
+            </a:r>
+            <a:endParaRPr lang="en-US" sz="2300" dirty="0"/>
+          </a:p>
+        </p:txBody>
+      </p:sp>
+      <p:sp>
+        <p:nvSpPr>
+          <p:cNvPr id="21" name="shape-149"/>
           <p:cNvSpPr/>
           <p:nvPr/>
         </p:nvSpPr>
@@ -6887,7 +7342,7 @@
       </p:sp>
       <p:sp>
         <p:nvSpPr>
-          <p:cNvPr id="10" name="text-138"/>
+          <p:cNvPr id="22" name="text-150"/>
           <p:cNvSpPr/>
           <p:nvPr/>
         </p:nvSpPr>
@@ -6914,9 +7369,9 @@
                 <a:solidFill>
                   <a:srgbClr val="FFFFFF"/>
                 </a:solidFill>
-                <a:latin typeface="Noto Sans CJK JP" pitchFamily="34" charset="0"/>
-                <a:ea typeface="Noto Sans CJK JP" pitchFamily="34" charset="-122"/>
-                <a:cs typeface="Noto Sans CJK JP" pitchFamily="34" charset="-120"/>
+                <a:latin typeface="BIZ UDPGothic" pitchFamily="34" charset="0"/>
+                <a:ea typeface="BIZ UDPGothic" pitchFamily="34" charset="-122"/>
+                <a:cs typeface="BIZ UDPGothic" pitchFamily="34" charset="-120"/>
               </a:rPr>
               <a:t>→ 受付</a:t>
             </a:r>
@@ -6926,392 +7381,14 @@
       </p:sp>
       <p:sp>
         <p:nvSpPr>
-          <p:cNvPr id="11" name="line-139"/>
-          <p:cNvSpPr/>
-          <p:nvPr/>
-        </p:nvSpPr>
-        <p:spPr>
-          <a:xfrm flipH="1" flipV="1">
-            <a:off x="2377440" y="3090672"/>
-            <a:ext cx="3749040" cy="1133856"/>
-          </a:xfrm>
-          <a:prstGeom prst="line">
-            <a:avLst/>
-          </a:prstGeom>
-          <a:noFill/>
-          <a:ln w="20320">
-            <a:solidFill>
-              <a:srgbClr val="ADC2D3"/>
-            </a:solidFill>
-            <a:prstDash val="solid"/>
-            <a:tailEnd type="none"/>
-          </a:ln>
-        </p:spPr>
-      </p:sp>
-      <p:sp>
-        <p:nvSpPr>
-          <p:cNvPr id="12" name="text-140"/>
-          <p:cNvSpPr/>
-          <p:nvPr/>
-        </p:nvSpPr>
-        <p:spPr>
-          <a:xfrm>
-            <a:off x="1920240" y="2907792"/>
-            <a:ext cx="2194560" cy="411480"/>
-          </a:xfrm>
-          <a:prstGeom prst="rect">
-            <a:avLst/>
-          </a:prstGeom>
-          <a:noFill/>
-          <a:ln/>
-        </p:spPr>
-        <p:txBody>
-          <a:bodyPr wrap="square" lIns="0" tIns="0" rIns="0" bIns="0" rtlCol="0" anchor="ctr"/>
-          <a:lstStyle/>
-          <a:p>
-            <a:pPr indent="0" marL="0">
-              <a:buNone/>
-            </a:pPr>
-            <a:r>
-              <a:rPr lang="en-US" sz="2300" b="1" dirty="0">
-                <a:solidFill>
-                  <a:srgbClr val="024C98"/>
-                </a:solidFill>
-                <a:latin typeface="Noto Sans CJK JP" pitchFamily="34" charset="0"/>
-                <a:ea typeface="Noto Sans CJK JP" pitchFamily="34" charset="-122"/>
-                <a:cs typeface="Noto Sans CJK JP" pitchFamily="34" charset="-120"/>
-              </a:rPr>
-              <a:t>混雑</a:t>
-            </a:r>
-            <a:endParaRPr lang="en-US" sz="2300" dirty="0"/>
-          </a:p>
-        </p:txBody>
-      </p:sp>
-      <p:sp>
-        <p:nvSpPr>
-          <p:cNvPr id="13" name="line-141"/>
-          <p:cNvSpPr/>
-          <p:nvPr/>
-        </p:nvSpPr>
-        <p:spPr>
-          <a:xfrm flipH="1" flipV="1">
-            <a:off x="6016752" y="2953512"/>
-            <a:ext cx="109728" cy="1271016"/>
-          </a:xfrm>
-          <a:prstGeom prst="line">
-            <a:avLst/>
-          </a:prstGeom>
-          <a:noFill/>
-          <a:ln w="20320">
-            <a:solidFill>
-              <a:srgbClr val="ADC2D3"/>
-            </a:solidFill>
-            <a:prstDash val="solid"/>
-            <a:tailEnd type="none"/>
-          </a:ln>
-        </p:spPr>
-      </p:sp>
-      <p:sp>
-        <p:nvSpPr>
-          <p:cNvPr id="14" name="text-142"/>
-          <p:cNvSpPr/>
-          <p:nvPr/>
-        </p:nvSpPr>
-        <p:spPr>
-          <a:xfrm>
-            <a:off x="5559552" y="2770632"/>
-            <a:ext cx="2194560" cy="411480"/>
-          </a:xfrm>
-          <a:prstGeom prst="rect">
-            <a:avLst/>
-          </a:prstGeom>
-          <a:noFill/>
-          <a:ln/>
-        </p:spPr>
-        <p:txBody>
-          <a:bodyPr wrap="square" lIns="0" tIns="0" rIns="0" bIns="0" rtlCol="0" anchor="ctr"/>
-          <a:lstStyle/>
-          <a:p>
-            <a:pPr indent="0" marL="0">
-              <a:buNone/>
-            </a:pPr>
-            <a:r>
-              <a:rPr lang="en-US" sz="2300" b="1" dirty="0">
-                <a:solidFill>
-                  <a:srgbClr val="024C98"/>
-                </a:solidFill>
-                <a:latin typeface="Noto Sans CJK JP" pitchFamily="34" charset="0"/>
-                <a:ea typeface="Noto Sans CJK JP" pitchFamily="34" charset="-122"/>
-                <a:cs typeface="Noto Sans CJK JP" pitchFamily="34" charset="-120"/>
-              </a:rPr>
-              <a:t>照明</a:t>
-            </a:r>
-            <a:endParaRPr lang="en-US" sz="2300" dirty="0"/>
-          </a:p>
-        </p:txBody>
-      </p:sp>
-      <p:sp>
-        <p:nvSpPr>
-          <p:cNvPr id="15" name="line-143"/>
-          <p:cNvSpPr/>
-          <p:nvPr/>
-        </p:nvSpPr>
-        <p:spPr>
-          <a:xfrm flipV="1">
-            <a:off x="6126480" y="3090672"/>
-            <a:ext cx="3657600" cy="1133856"/>
-          </a:xfrm>
-          <a:prstGeom prst="line">
-            <a:avLst/>
-          </a:prstGeom>
-          <a:noFill/>
-          <a:ln w="20320">
-            <a:solidFill>
-              <a:srgbClr val="ADC2D3"/>
-            </a:solidFill>
-            <a:prstDash val="solid"/>
-            <a:tailEnd type="none"/>
-          </a:ln>
-        </p:spPr>
-      </p:sp>
-      <p:sp>
-        <p:nvSpPr>
-          <p:cNvPr id="16" name="text-144"/>
-          <p:cNvSpPr/>
-          <p:nvPr/>
-        </p:nvSpPr>
-        <p:spPr>
-          <a:xfrm>
-            <a:off x="9326880" y="2907792"/>
-            <a:ext cx="2194560" cy="411480"/>
-          </a:xfrm>
-          <a:prstGeom prst="rect">
-            <a:avLst/>
-          </a:prstGeom>
-          <a:noFill/>
-          <a:ln/>
-        </p:spPr>
-        <p:txBody>
-          <a:bodyPr wrap="square" lIns="0" tIns="0" rIns="0" bIns="0" rtlCol="0" anchor="ctr"/>
-          <a:lstStyle/>
-          <a:p>
-            <a:pPr indent="0" marL="0">
-              <a:buNone/>
-            </a:pPr>
-            <a:r>
-              <a:rPr lang="en-US" sz="2300" b="1" dirty="0">
-                <a:solidFill>
-                  <a:srgbClr val="024C98"/>
-                </a:solidFill>
-                <a:latin typeface="Noto Sans CJK JP" pitchFamily="34" charset="0"/>
-                <a:ea typeface="Noto Sans CJK JP" pitchFamily="34" charset="-122"/>
-                <a:cs typeface="Noto Sans CJK JP" pitchFamily="34" charset="-120"/>
-              </a:rPr>
-              <a:t>言語</a:t>
-            </a:r>
-            <a:endParaRPr lang="en-US" sz="2300" dirty="0"/>
-          </a:p>
-        </p:txBody>
-      </p:sp>
-      <p:sp>
-        <p:nvSpPr>
-          <p:cNvPr id="17" name="line-145"/>
-          <p:cNvSpPr/>
-          <p:nvPr/>
-        </p:nvSpPr>
-        <p:spPr>
-          <a:xfrm flipH="1">
-            <a:off x="2377440" y="4224528"/>
-            <a:ext cx="3749040" cy="1353312"/>
-          </a:xfrm>
-          <a:prstGeom prst="line">
-            <a:avLst/>
-          </a:prstGeom>
-          <a:noFill/>
-          <a:ln w="20320">
-            <a:solidFill>
-              <a:srgbClr val="ADC2D3"/>
-            </a:solidFill>
-            <a:prstDash val="solid"/>
-            <a:tailEnd type="none"/>
-          </a:ln>
-        </p:spPr>
-      </p:sp>
-      <p:sp>
-        <p:nvSpPr>
-          <p:cNvPr id="18" name="text-146"/>
-          <p:cNvSpPr/>
-          <p:nvPr/>
-        </p:nvSpPr>
-        <p:spPr>
-          <a:xfrm>
-            <a:off x="1920240" y="5394960"/>
-            <a:ext cx="2194560" cy="411480"/>
-          </a:xfrm>
-          <a:prstGeom prst="rect">
-            <a:avLst/>
-          </a:prstGeom>
-          <a:noFill/>
-          <a:ln/>
-        </p:spPr>
-        <p:txBody>
-          <a:bodyPr wrap="square" lIns="0" tIns="0" rIns="0" bIns="0" rtlCol="0" anchor="ctr"/>
-          <a:lstStyle/>
-          <a:p>
-            <a:pPr indent="0" marL="0">
-              <a:buNone/>
-            </a:pPr>
-            <a:r>
-              <a:rPr lang="en-US" sz="2300" b="1" dirty="0">
-                <a:solidFill>
-                  <a:srgbClr val="024C98"/>
-                </a:solidFill>
-                <a:latin typeface="Noto Sans CJK JP" pitchFamily="34" charset="0"/>
-                <a:ea typeface="Noto Sans CJK JP" pitchFamily="34" charset="-122"/>
-                <a:cs typeface="Noto Sans CJK JP" pitchFamily="34" charset="-120"/>
-              </a:rPr>
-              <a:t>視覚</a:t>
-            </a:r>
-            <a:endParaRPr lang="en-US" sz="2300" dirty="0"/>
-          </a:p>
-        </p:txBody>
-      </p:sp>
-      <p:sp>
-        <p:nvSpPr>
-          <p:cNvPr id="19" name="line-147"/>
-          <p:cNvSpPr/>
-          <p:nvPr/>
-        </p:nvSpPr>
-        <p:spPr>
-          <a:xfrm flipH="1">
-            <a:off x="6016752" y="4224528"/>
-            <a:ext cx="109728" cy="1536192"/>
-          </a:xfrm>
-          <a:prstGeom prst="line">
-            <a:avLst/>
-          </a:prstGeom>
-          <a:noFill/>
-          <a:ln w="20320">
-            <a:solidFill>
-              <a:srgbClr val="ADC2D3"/>
-            </a:solidFill>
-            <a:prstDash val="solid"/>
-            <a:tailEnd type="none"/>
-          </a:ln>
-        </p:spPr>
-      </p:sp>
-      <p:sp>
-        <p:nvSpPr>
-          <p:cNvPr id="20" name="text-148"/>
-          <p:cNvSpPr/>
-          <p:nvPr/>
-        </p:nvSpPr>
-        <p:spPr>
-          <a:xfrm>
-            <a:off x="5559552" y="5577840"/>
-            <a:ext cx="2194560" cy="411480"/>
-          </a:xfrm>
-          <a:prstGeom prst="rect">
-            <a:avLst/>
-          </a:prstGeom>
-          <a:noFill/>
-          <a:ln/>
-        </p:spPr>
-        <p:txBody>
-          <a:bodyPr wrap="square" lIns="0" tIns="0" rIns="0" bIns="0" rtlCol="0" anchor="ctr"/>
-          <a:lstStyle/>
-          <a:p>
-            <a:pPr indent="0" marL="0">
-              <a:buNone/>
-            </a:pPr>
-            <a:r>
-              <a:rPr lang="en-US" sz="2300" b="1" dirty="0">
-                <a:solidFill>
-                  <a:srgbClr val="024C98"/>
-                </a:solidFill>
-                <a:latin typeface="Noto Sans CJK JP" pitchFamily="34" charset="0"/>
-                <a:ea typeface="Noto Sans CJK JP" pitchFamily="34" charset="-122"/>
-                <a:cs typeface="Noto Sans CJK JP" pitchFamily="34" charset="-120"/>
-              </a:rPr>
-              <a:t>移動</a:t>
-            </a:r>
-            <a:endParaRPr lang="en-US" sz="2300" dirty="0"/>
-          </a:p>
-        </p:txBody>
-      </p:sp>
-      <p:sp>
-        <p:nvSpPr>
-          <p:cNvPr id="21" name="line-149"/>
-          <p:cNvSpPr/>
-          <p:nvPr/>
-        </p:nvSpPr>
-        <p:spPr>
-          <a:xfrm>
-            <a:off x="6126480" y="4224528"/>
-            <a:ext cx="3474720" cy="1353312"/>
-          </a:xfrm>
-          <a:prstGeom prst="line">
-            <a:avLst/>
-          </a:prstGeom>
-          <a:noFill/>
-          <a:ln w="20320">
-            <a:solidFill>
-              <a:srgbClr val="ADC2D3"/>
-            </a:solidFill>
-            <a:prstDash val="solid"/>
-            <a:tailEnd type="none"/>
-          </a:ln>
-        </p:spPr>
-      </p:sp>
-      <p:sp>
-        <p:nvSpPr>
-          <p:cNvPr id="22" name="text-150"/>
-          <p:cNvSpPr/>
-          <p:nvPr/>
-        </p:nvSpPr>
-        <p:spPr>
-          <a:xfrm>
-            <a:off x="9144000" y="5394960"/>
-            <a:ext cx="2194560" cy="411480"/>
-          </a:xfrm>
-          <a:prstGeom prst="rect">
-            <a:avLst/>
-          </a:prstGeom>
-          <a:noFill/>
-          <a:ln/>
-        </p:spPr>
-        <p:txBody>
-          <a:bodyPr wrap="square" lIns="0" tIns="0" rIns="0" bIns="0" rtlCol="0" anchor="ctr"/>
-          <a:lstStyle/>
-          <a:p>
-            <a:pPr indent="0" marL="0">
-              <a:buNone/>
-            </a:pPr>
-            <a:r>
-              <a:rPr lang="en-US" sz="2300" b="1" dirty="0">
-                <a:solidFill>
-                  <a:srgbClr val="024C98"/>
-                </a:solidFill>
-                <a:latin typeface="Noto Sans CJK JP" pitchFamily="34" charset="0"/>
-                <a:ea typeface="Noto Sans CJK JP" pitchFamily="34" charset="-122"/>
-                <a:cs typeface="Noto Sans CJK JP" pitchFamily="34" charset="-120"/>
-              </a:rPr>
-              <a:t>他の掲示</a:t>
-            </a:r>
-            <a:endParaRPr lang="en-US" sz="2300" dirty="0"/>
-          </a:p>
-        </p:txBody>
-      </p:sp>
-      <p:sp>
-        <p:nvSpPr>
           <p:cNvPr id="23" name="text-151"/>
           <p:cNvSpPr/>
           <p:nvPr/>
         </p:nvSpPr>
         <p:spPr>
           <a:xfrm>
-            <a:off x="822960" y="6080760"/>
-            <a:ext cx="10698480" cy="274320"/>
+            <a:off x="822960" y="5897880"/>
+            <a:ext cx="10698480" cy="320040"/>
           </a:xfrm>
           <a:prstGeom prst="rect">
             <a:avLst/>
@@ -7331,9 +7408,9 @@
                 <a:solidFill>
                   <a:srgbClr val="52677B"/>
                 </a:solidFill>
-                <a:latin typeface="Noto Sans CJK JP" pitchFamily="34" charset="0"/>
-                <a:ea typeface="Noto Sans CJK JP" pitchFamily="34" charset="-122"/>
-                <a:cs typeface="Noto Sans CJK JP" pitchFamily="34" charset="-120"/>
+                <a:latin typeface="BIZ UDPGothic" pitchFamily="34" charset="0"/>
+                <a:ea typeface="BIZ UDPGothic" pitchFamily="34" charset="-122"/>
+                <a:cs typeface="BIZ UDPGothic" pitchFamily="34" charset="-120"/>
               </a:rPr>
               <a:t>対象は入口から受付まで。多様な利用者の確認と現地調整が必要。</a:t>
             </a:r>
@@ -7350,7 +7427,7 @@
 </file>
 
 <file path=ppt/slides/slide8.xml><?xml version="1.0" encoding="utf-8"?>
-<p:sld xmlns:a="http://schemas.openxmlformats.org/drawingml/2006/main" xmlns:r="http://schemas.openxmlformats.org/officeDocument/2006/relationships" xmlns:p="http://schemas.openxmlformats.org/presentationml/2006/main">
+<p:sld xmlns:a="http://schemas.openxmlformats.org/drawingml/2006/main" xmlns:p="http://schemas.openxmlformats.org/presentationml/2006/main" xmlns:r="http://schemas.openxmlformats.org/officeDocument/2006/relationships">
   <p:cSld name="Slide 8">
     <p:bg>
       <p:bgPr>
@@ -7402,9 +7479,9 @@
                 <a:solidFill>
                   <a:srgbClr val="52677B"/>
                 </a:solidFill>
-                <a:latin typeface="Noto Sans CJK JP" pitchFamily="34" charset="0"/>
-                <a:ea typeface="Noto Sans CJK JP" pitchFamily="34" charset="-122"/>
-                <a:cs typeface="Noto Sans CJK JP" pitchFamily="34" charset="-120"/>
+                <a:latin typeface="BIZ UDPGothic" pitchFamily="34" charset="0"/>
+                <a:ea typeface="BIZ UDPGothic" pitchFamily="34" charset="-122"/>
+                <a:cs typeface="BIZ UDPGothic" pitchFamily="34" charset="-120"/>
               </a:rPr>
               <a:t>小さな道案内  /  研究計画</a:t>
             </a:r>
@@ -7441,9 +7518,9 @@
                 <a:solidFill>
                   <a:srgbClr val="024C98"/>
                 </a:solidFill>
-                <a:latin typeface="Noto Sans CJK JP" pitchFamily="34" charset="0"/>
-                <a:ea typeface="Noto Sans CJK JP" pitchFamily="34" charset="-122"/>
-                <a:cs typeface="Noto Sans CJK JP" pitchFamily="34" charset="-120"/>
+                <a:latin typeface="BIZ UDPGothic" pitchFamily="34" charset="0"/>
+                <a:ea typeface="BIZ UDPGothic" pitchFamily="34" charset="-122"/>
+                <a:cs typeface="BIZ UDPGothic" pitchFamily="34" charset="-120"/>
               </a:rPr>
               <a:t>08</a:t>
             </a:r>
@@ -7480,9 +7557,9 @@
                 <a:solidFill>
                   <a:srgbClr val="024C98"/>
                 </a:solidFill>
-                <a:latin typeface="Noto Sans CJK JP" pitchFamily="34" charset="0"/>
-                <a:ea typeface="Noto Sans CJK JP" pitchFamily="34" charset="-122"/>
-                <a:cs typeface="Noto Sans CJK JP" pitchFamily="34" charset="-120"/>
+                <a:latin typeface="BIZ UDPGothic" pitchFamily="34" charset="0"/>
+                <a:ea typeface="BIZ UDPGothic" pitchFamily="34" charset="-122"/>
+                <a:cs typeface="BIZ UDPGothic" pitchFamily="34" charset="-120"/>
               </a:rPr>
               <a:t>次の一歩：一つの分岐で確かめる</a:t>
             </a:r>
@@ -7546,9 +7623,9 @@
                 <a:solidFill>
                   <a:srgbClr val="52677B"/>
                 </a:solidFill>
-                <a:latin typeface="Noto Sans CJK JP" pitchFamily="34" charset="0"/>
-                <a:ea typeface="Noto Sans CJK JP" pitchFamily="34" charset="-122"/>
-                <a:cs typeface="Noto Sans CJK JP" pitchFamily="34" charset="-120"/>
+                <a:latin typeface="BIZ UDPGothic" pitchFamily="34" charset="0"/>
+                <a:ea typeface="BIZ UDPGothic" pitchFamily="34" charset="-122"/>
+                <a:cs typeface="BIZ UDPGothic" pitchFamily="34" charset="-120"/>
               </a:rPr>
               <a:t>架空・未実施の研究提案</a:t>
             </a:r>
@@ -7585,11 +7662,11 @@
                 <a:solidFill>
                   <a:srgbClr val="024C98"/>
                 </a:solidFill>
-                <a:latin typeface="Noto Sans CJK JP" pitchFamily="34" charset="0"/>
-                <a:ea typeface="Noto Sans CJK JP" pitchFamily="34" charset="-122"/>
-                <a:cs typeface="Noto Sans CJK JP" pitchFamily="34" charset="-120"/>
-              </a:rPr>
-              <a:t>誰もが、次の一歩を</a:t>
+                <a:latin typeface="BIZ UDPGothic" pitchFamily="34" charset="0"/>
+                <a:ea typeface="BIZ UDPGothic" pitchFamily="34" charset="-122"/>
+                <a:cs typeface="BIZ UDPGothic" pitchFamily="34" charset="-120"/>
+              </a:rPr>
+              <a:t>模擬評価の結果を見て、</a:t>
             </a:r>
             <a:endParaRPr lang="en-US" sz="3400" dirty="0"/>
           </a:p>
@@ -7602,11 +7679,11 @@
                 <a:solidFill>
                   <a:srgbClr val="024C98"/>
                 </a:solidFill>
-                <a:latin typeface="Noto Sans CJK JP" pitchFamily="34" charset="0"/>
-                <a:ea typeface="Noto Sans CJK JP" pitchFamily="34" charset="-122"/>
-                <a:cs typeface="Noto Sans CJK JP" pitchFamily="34" charset="-120"/>
-              </a:rPr>
-              <a:t>選びやすい案内へ</a:t>
+                <a:latin typeface="BIZ UDPGothic" pitchFamily="34" charset="0"/>
+                <a:ea typeface="BIZ UDPGothic" pitchFamily="34" charset="-122"/>
+                <a:cs typeface="BIZ UDPGothic" pitchFamily="34" charset="-120"/>
+              </a:rPr>
+              <a:t>サインの案を修正する</a:t>
             </a:r>
             <a:endParaRPr lang="en-US" sz="3400" dirty="0"/>
           </a:p>
@@ -7620,458 +7697,464 @@
         </p:nvSpPr>
         <p:spPr>
           <a:xfrm>
-            <a:off x="1005840" y="4041648"/>
-            <a:ext cx="2468880" cy="457200"/>
-          </a:xfrm>
-          <a:prstGeom prst="rect">
-            <a:avLst/>
-          </a:prstGeom>
-          <a:noFill/>
-          <a:ln/>
-        </p:spPr>
-        <p:txBody>
-          <a:bodyPr wrap="square" lIns="0" tIns="0" rIns="0" bIns="0" rtlCol="0" anchor="ctr"/>
-          <a:lstStyle/>
-          <a:p>
-            <a:pPr indent="0" marL="0">
-              <a:buNone/>
-            </a:pPr>
-            <a:r>
-              <a:rPr lang="en-US" sz="2400" b="1" dirty="0">
-                <a:solidFill>
-                  <a:srgbClr val="024C98"/>
-                </a:solidFill>
-                <a:latin typeface="Noto Sans CJK JP" pitchFamily="34" charset="0"/>
-                <a:ea typeface="Noto Sans CJK JP" pitchFamily="34" charset="-122"/>
-                <a:cs typeface="Noto Sans CJK JP" pitchFamily="34" charset="-120"/>
-              </a:rPr>
-              <a:t>試作</a:t>
-            </a:r>
-            <a:endParaRPr lang="en-US" sz="2400" dirty="0"/>
-          </a:p>
-        </p:txBody>
-      </p:sp>
-      <p:sp>
-        <p:nvSpPr>
-          <p:cNvPr id="10" name="text-159"/>
-          <p:cNvSpPr/>
-          <p:nvPr/>
-        </p:nvSpPr>
-        <p:spPr>
-          <a:xfrm>
-            <a:off x="3694176" y="4041648"/>
-            <a:ext cx="2468880" cy="457200"/>
-          </a:xfrm>
-          <a:prstGeom prst="rect">
-            <a:avLst/>
-          </a:prstGeom>
-          <a:noFill/>
-          <a:ln/>
-        </p:spPr>
-        <p:txBody>
-          <a:bodyPr wrap="square" lIns="0" tIns="0" rIns="0" bIns="0" rtlCol="0" anchor="ctr"/>
-          <a:lstStyle/>
-          <a:p>
-            <a:pPr indent="0" marL="0">
-              <a:buNone/>
-            </a:pPr>
-            <a:r>
-              <a:rPr lang="en-US" sz="2400" b="1" dirty="0">
-                <a:solidFill>
-                  <a:srgbClr val="024C98"/>
-                </a:solidFill>
-                <a:latin typeface="Noto Sans CJK JP" pitchFamily="34" charset="0"/>
-                <a:ea typeface="Noto Sans CJK JP" pitchFamily="34" charset="-122"/>
-                <a:cs typeface="Noto Sans CJK JP" pitchFamily="34" charset="-120"/>
-              </a:rPr>
-              <a:t>手順確認</a:t>
-            </a:r>
-            <a:endParaRPr lang="en-US" sz="2400" dirty="0"/>
-          </a:p>
-        </p:txBody>
-      </p:sp>
-      <p:sp>
-        <p:nvSpPr>
-          <p:cNvPr id="11" name="text-160"/>
-          <p:cNvSpPr/>
-          <p:nvPr/>
-        </p:nvSpPr>
-        <p:spPr>
-          <a:xfrm>
-            <a:off x="7315200" y="4041648"/>
-            <a:ext cx="2468880" cy="457200"/>
-          </a:xfrm>
-          <a:prstGeom prst="rect">
-            <a:avLst/>
-          </a:prstGeom>
-          <a:noFill/>
-          <a:ln/>
-        </p:spPr>
-        <p:txBody>
-          <a:bodyPr wrap="square" lIns="0" tIns="0" rIns="0" bIns="0" rtlCol="0" anchor="ctr"/>
-          <a:lstStyle/>
-          <a:p>
-            <a:pPr indent="0" marL="0">
-              <a:buNone/>
-            </a:pPr>
-            <a:r>
-              <a:rPr lang="en-US" sz="2400" b="1" dirty="0">
-                <a:solidFill>
-                  <a:srgbClr val="024C98"/>
-                </a:solidFill>
-                <a:latin typeface="Noto Sans CJK JP" pitchFamily="34" charset="0"/>
-                <a:ea typeface="Noto Sans CJK JP" pitchFamily="34" charset="-122"/>
-                <a:cs typeface="Noto Sans CJK JP" pitchFamily="34" charset="-120"/>
-              </a:rPr>
-              <a:t>模擬評価</a:t>
-            </a:r>
-            <a:endParaRPr lang="en-US" sz="2400" dirty="0"/>
-          </a:p>
-        </p:txBody>
-      </p:sp>
-      <p:sp>
-        <p:nvSpPr>
-          <p:cNvPr id="12" name="text-161"/>
-          <p:cNvSpPr/>
-          <p:nvPr/>
-        </p:nvSpPr>
-        <p:spPr>
-          <a:xfrm>
-            <a:off x="9784080" y="5266944"/>
-            <a:ext cx="2468880" cy="457200"/>
-          </a:xfrm>
-          <a:prstGeom prst="rect">
-            <a:avLst/>
-          </a:prstGeom>
-          <a:noFill/>
-          <a:ln/>
-        </p:spPr>
-        <p:txBody>
-          <a:bodyPr wrap="square" lIns="0" tIns="0" rIns="0" bIns="0" rtlCol="0" anchor="ctr"/>
-          <a:lstStyle/>
-          <a:p>
-            <a:pPr indent="0" marL="0">
-              <a:buNone/>
-            </a:pPr>
-            <a:r>
-              <a:rPr lang="en-US" sz="2400" b="1" dirty="0">
-                <a:solidFill>
-                  <a:srgbClr val="024C98"/>
-                </a:solidFill>
-                <a:latin typeface="Noto Sans CJK JP" pitchFamily="34" charset="0"/>
-                <a:ea typeface="Noto Sans CJK JP" pitchFamily="34" charset="-122"/>
-                <a:cs typeface="Noto Sans CJK JP" pitchFamily="34" charset="-120"/>
-              </a:rPr>
-              <a:t>修正</a:t>
-            </a:r>
-            <a:endParaRPr lang="en-US" sz="2400" dirty="0"/>
-          </a:p>
-        </p:txBody>
-      </p:sp>
-      <p:sp>
-        <p:nvSpPr>
-          <p:cNvPr id="13" name="line-162"/>
-          <p:cNvSpPr/>
-          <p:nvPr/>
-        </p:nvSpPr>
-        <p:spPr>
-          <a:xfrm>
-            <a:off x="2194560" y="4260342"/>
-            <a:ext cx="1097280" cy="38100"/>
-          </a:xfrm>
-          <a:prstGeom prst="rect">
-            <a:avLst/>
-          </a:prstGeom>
-          <a:solidFill>
-            <a:srgbClr val="1D5EA7"/>
-          </a:solidFill>
-          <a:ln w="12700">
+            <a:off x="777240" y="3310128"/>
+            <a:ext cx="8229600" cy="320040"/>
+          </a:xfrm>
+          <a:prstGeom prst="rect">
+            <a:avLst/>
+          </a:prstGeom>
+          <a:noFill/>
+          <a:ln/>
+        </p:spPr>
+        <p:txBody>
+          <a:bodyPr wrap="square" lIns="0" tIns="0" rIns="0" bIns="0" rtlCol="0" anchor="ctr"/>
+          <a:lstStyle/>
+          <a:p>
+            <a:pPr indent="0" marL="0">
+              <a:buNone/>
+            </a:pPr>
+            <a:r>
+              <a:rPr lang="en-US" sz="1900" dirty="0">
+                <a:solidFill>
+                  <a:srgbClr val="52677B"/>
+                </a:solidFill>
+                <a:latin typeface="BIZ UDPGothic" pitchFamily="34" charset="0"/>
+                <a:ea typeface="BIZ UDPGothic" pitchFamily="34" charset="-122"/>
+                <a:cs typeface="BIZ UDPGothic" pitchFamily="34" charset="-120"/>
+              </a:rPr>
+              <a:t>未実施の研究計画</a:t>
+            </a:r>
+            <a:endParaRPr lang="en-US" sz="1900" dirty="0"/>
+          </a:p>
+        </p:txBody>
+      </p:sp>
+      <p:grpSp>
+        <p:nvGrpSpPr>
+          <p:cNvPr id="23" name="GROUP_prototype"/>
+          <p:cNvGrpSpPr/>
+          <p:nvPr/>
+        </p:nvGrpSpPr>
+        <p:grpSpPr>
+          <a:xfrm>
+            <a:off x="1005840" y="3931920"/>
+            <a:ext cx="2011680" cy="685800"/>
+            <a:chOff x="1005840" y="3931920"/>
+            <a:chExt cx="2011680" cy="685800"/>
+          </a:xfrm>
+        </p:grpSpPr>
+        <p:sp>
+          <p:nvSpPr>
+            <p:cNvPr id="10" name="NODE_prototype"/>
+            <p:cNvSpPr/>
+            <p:nvPr/>
+          </p:nvSpPr>
+          <p:spPr>
+            <a:xfrm>
+              <a:off x="1005840" y="3931920"/>
+              <a:ext cx="2011680" cy="685800"/>
+            </a:xfrm>
+            <a:prstGeom prst="rect">
+              <a:avLst/>
+            </a:prstGeom>
             <a:solidFill>
-              <a:srgbClr val="1D5EA7">
-                <a:alpha val="0"/>
-              </a:srgbClr>
+              <a:srgbClr val="EDF4FB"/>
             </a:solidFill>
-            <a:prstDash val="solid"/>
-          </a:ln>
-        </p:spPr>
-      </p:sp>
-      <p:sp>
-        <p:nvSpPr>
-          <p:cNvPr id="14" name="arrow-163"/>
-          <p:cNvSpPr/>
-          <p:nvPr/>
-        </p:nvSpPr>
-        <p:spPr>
-          <a:xfrm rot="5400000">
-            <a:off x="3223260" y="4210812"/>
-            <a:ext cx="137160" cy="137160"/>
-          </a:xfrm>
-          <a:prstGeom prst="triangle">
-            <a:avLst/>
-          </a:prstGeom>
-          <a:solidFill>
-            <a:srgbClr val="1D5EA7"/>
-          </a:solidFill>
-          <a:ln w="12700">
+            <a:ln w="16510">
+              <a:solidFill>
+                <a:srgbClr val="024C98"/>
+              </a:solidFill>
+              <a:prstDash val="solid"/>
+            </a:ln>
+          </p:spPr>
+        </p:sp>
+        <p:sp>
+          <p:nvSpPr>
+            <p:cNvPr id="11" name="TEXT_prototype"/>
+            <p:cNvSpPr/>
+            <p:nvPr/>
+          </p:nvSpPr>
+          <p:spPr>
+            <a:xfrm>
+              <a:off x="1097280" y="4041648"/>
+              <a:ext cx="1828800" cy="457200"/>
+            </a:xfrm>
+            <a:prstGeom prst="rect">
+              <a:avLst/>
+            </a:prstGeom>
+            <a:noFill/>
+            <a:ln/>
+          </p:spPr>
+          <p:txBody>
+            <a:bodyPr wrap="square" lIns="0" tIns="0" rIns="0" bIns="0" rtlCol="0" anchor="ctr"/>
+            <a:lstStyle/>
+            <a:p>
+              <a:pPr algn="ctr" indent="0" marL="0">
+                <a:buNone/>
+              </a:pPr>
+              <a:r>
+                <a:rPr lang="en-US" sz="2400" b="1" dirty="0">
+                  <a:solidFill>
+                    <a:srgbClr val="024C98"/>
+                  </a:solidFill>
+                  <a:latin typeface="BIZ UDPGothic" pitchFamily="34" charset="0"/>
+                  <a:ea typeface="BIZ UDPGothic" pitchFamily="34" charset="-122"/>
+                  <a:cs typeface="BIZ UDPGothic" pitchFamily="34" charset="-120"/>
+                </a:rPr>
+                <a:t>試作</a:t>
+              </a:r>
+              <a:endParaRPr lang="en-US" sz="2400" dirty="0"/>
+            </a:p>
+          </p:txBody>
+        </p:sp>
+      </p:grpSp>
+      <p:grpSp>
+        <p:nvGrpSpPr>
+          <p:cNvPr id="24" name="GROUP_procedure"/>
+          <p:cNvGrpSpPr/>
+          <p:nvPr/>
+        </p:nvGrpSpPr>
+        <p:grpSpPr>
+          <a:xfrm>
+            <a:off x="4343400" y="3931920"/>
+            <a:ext cx="2423160" cy="685800"/>
+            <a:chOff x="4343400" y="3931920"/>
+            <a:chExt cx="2423160" cy="685800"/>
+          </a:xfrm>
+        </p:grpSpPr>
+        <p:sp>
+          <p:nvSpPr>
+            <p:cNvPr id="12" name="NODE_procedure"/>
+            <p:cNvSpPr/>
+            <p:nvPr/>
+          </p:nvSpPr>
+          <p:spPr>
+            <a:xfrm>
+              <a:off x="4343400" y="3931920"/>
+              <a:ext cx="2423160" cy="685800"/>
+            </a:xfrm>
+            <a:prstGeom prst="rect">
+              <a:avLst/>
+            </a:prstGeom>
+            <a:solidFill>
+              <a:srgbClr val="EDF4FB"/>
+            </a:solidFill>
+            <a:ln w="16510">
+              <a:solidFill>
+                <a:srgbClr val="024C98"/>
+              </a:solidFill>
+              <a:prstDash val="solid"/>
+            </a:ln>
+          </p:spPr>
+        </p:sp>
+        <p:sp>
+          <p:nvSpPr>
+            <p:cNvPr id="13" name="TEXT_procedure"/>
+            <p:cNvSpPr/>
+            <p:nvPr/>
+          </p:nvSpPr>
+          <p:spPr>
+            <a:xfrm>
+              <a:off x="4434840" y="4041648"/>
+              <a:ext cx="2240280" cy="457200"/>
+            </a:xfrm>
+            <a:prstGeom prst="rect">
+              <a:avLst/>
+            </a:prstGeom>
+            <a:noFill/>
+            <a:ln/>
+          </p:spPr>
+          <p:txBody>
+            <a:bodyPr wrap="square" lIns="0" tIns="0" rIns="0" bIns="0" rtlCol="0" anchor="ctr"/>
+            <a:lstStyle/>
+            <a:p>
+              <a:pPr algn="ctr" indent="0" marL="0">
+                <a:buNone/>
+              </a:pPr>
+              <a:r>
+                <a:rPr lang="en-US" sz="2400" b="1" dirty="0">
+                  <a:solidFill>
+                    <a:srgbClr val="024C98"/>
+                  </a:solidFill>
+                  <a:latin typeface="BIZ UDPGothic" pitchFamily="34" charset="0"/>
+                  <a:ea typeface="BIZ UDPGothic" pitchFamily="34" charset="-122"/>
+                  <a:cs typeface="BIZ UDPGothic" pitchFamily="34" charset="-120"/>
+                </a:rPr>
+                <a:t>手順確認</a:t>
+              </a:r>
+              <a:endParaRPr lang="en-US" sz="2400" dirty="0"/>
+            </a:p>
+          </p:txBody>
+        </p:sp>
+      </p:grpSp>
+      <p:grpSp>
+        <p:nvGrpSpPr>
+          <p:cNvPr id="25" name="GROUP_evaluate"/>
+          <p:cNvGrpSpPr/>
+          <p:nvPr/>
+        </p:nvGrpSpPr>
+        <p:grpSpPr>
+          <a:xfrm>
+            <a:off x="8366760" y="3931920"/>
+            <a:ext cx="2423160" cy="685800"/>
+            <a:chOff x="8366760" y="3931920"/>
+            <a:chExt cx="2423160" cy="685800"/>
+          </a:xfrm>
+        </p:grpSpPr>
+        <p:sp>
+          <p:nvSpPr>
+            <p:cNvPr id="14" name="NODE_evaluate"/>
+            <p:cNvSpPr/>
+            <p:nvPr/>
+          </p:nvSpPr>
+          <p:spPr>
+            <a:xfrm>
+              <a:off x="8366760" y="3931920"/>
+              <a:ext cx="2423160" cy="685800"/>
+            </a:xfrm>
+            <a:prstGeom prst="rect">
+              <a:avLst/>
+            </a:prstGeom>
+            <a:solidFill>
+              <a:srgbClr val="EDF4FB"/>
+            </a:solidFill>
+            <a:ln w="16510">
+              <a:solidFill>
+                <a:srgbClr val="024C98"/>
+              </a:solidFill>
+              <a:prstDash val="solid"/>
+            </a:ln>
+          </p:spPr>
+        </p:sp>
+        <p:sp>
+          <p:nvSpPr>
+            <p:cNvPr id="15" name="TEXT_evaluate"/>
+            <p:cNvSpPr/>
+            <p:nvPr/>
+          </p:nvSpPr>
+          <p:spPr>
+            <a:xfrm>
+              <a:off x="8458200" y="4041648"/>
+              <a:ext cx="2240280" cy="457200"/>
+            </a:xfrm>
+            <a:prstGeom prst="rect">
+              <a:avLst/>
+            </a:prstGeom>
+            <a:noFill/>
+            <a:ln/>
+          </p:spPr>
+          <p:txBody>
+            <a:bodyPr wrap="square" lIns="0" tIns="0" rIns="0" bIns="0" rtlCol="0" anchor="ctr"/>
+            <a:lstStyle/>
+            <a:p>
+              <a:pPr algn="ctr" indent="0" marL="0">
+                <a:buNone/>
+              </a:pPr>
+              <a:r>
+                <a:rPr lang="en-US" sz="2400" b="1" dirty="0">
+                  <a:solidFill>
+                    <a:srgbClr val="024C98"/>
+                  </a:solidFill>
+                  <a:latin typeface="BIZ UDPGothic" pitchFamily="34" charset="0"/>
+                  <a:ea typeface="BIZ UDPGothic" pitchFamily="34" charset="-122"/>
+                  <a:cs typeface="BIZ UDPGothic" pitchFamily="34" charset="-120"/>
+                </a:rPr>
+                <a:t>模擬評価</a:t>
+              </a:r>
+              <a:endParaRPr lang="en-US" sz="2400" dirty="0"/>
+            </a:p>
+          </p:txBody>
+        </p:sp>
+      </p:grpSp>
+      <p:grpSp>
+        <p:nvGrpSpPr>
+          <p:cNvPr id="26" name="GROUP_revise"/>
+          <p:cNvGrpSpPr/>
+          <p:nvPr/>
+        </p:nvGrpSpPr>
+        <p:grpSpPr>
+          <a:xfrm>
+            <a:off x="8366760" y="5166360"/>
+            <a:ext cx="2423160" cy="685800"/>
+            <a:chOff x="8366760" y="5166360"/>
+            <a:chExt cx="2423160" cy="685800"/>
+          </a:xfrm>
+        </p:grpSpPr>
+        <p:sp>
+          <p:nvSpPr>
+            <p:cNvPr id="16" name="NODE_revise"/>
+            <p:cNvSpPr/>
+            <p:nvPr/>
+          </p:nvSpPr>
+          <p:spPr>
+            <a:xfrm>
+              <a:off x="8366760" y="5166360"/>
+              <a:ext cx="2423160" cy="685800"/>
+            </a:xfrm>
+            <a:prstGeom prst="rect">
+              <a:avLst/>
+            </a:prstGeom>
+            <a:solidFill>
+              <a:srgbClr val="EDF4FB"/>
+            </a:solidFill>
+            <a:ln w="16510">
+              <a:solidFill>
+                <a:srgbClr val="024C98"/>
+              </a:solidFill>
+              <a:prstDash val="solid"/>
+            </a:ln>
+          </p:spPr>
+        </p:sp>
+        <p:sp>
+          <p:nvSpPr>
+            <p:cNvPr id="17" name="TEXT_revise"/>
+            <p:cNvSpPr/>
+            <p:nvPr/>
+          </p:nvSpPr>
+          <p:spPr>
+            <a:xfrm>
+              <a:off x="8458200" y="5276088"/>
+              <a:ext cx="2240280" cy="457200"/>
+            </a:xfrm>
+            <a:prstGeom prst="rect">
+              <a:avLst/>
+            </a:prstGeom>
+            <a:noFill/>
+            <a:ln/>
+          </p:spPr>
+          <p:txBody>
+            <a:bodyPr wrap="square" lIns="0" tIns="0" rIns="0" bIns="0" rtlCol="0" anchor="ctr"/>
+            <a:lstStyle/>
+            <a:p>
+              <a:pPr algn="ctr" indent="0" marL="0">
+                <a:buNone/>
+              </a:pPr>
+              <a:r>
+                <a:rPr lang="en-US" sz="2400" b="1" dirty="0">
+                  <a:solidFill>
+                    <a:srgbClr val="024C98"/>
+                  </a:solidFill>
+                  <a:latin typeface="BIZ UDPGothic" pitchFamily="34" charset="0"/>
+                  <a:ea typeface="BIZ UDPGothic" pitchFamily="34" charset="-122"/>
+                  <a:cs typeface="BIZ UDPGothic" pitchFamily="34" charset="-120"/>
+                </a:rPr>
+                <a:t>修正</a:t>
+              </a:r>
+              <a:endParaRPr lang="en-US" sz="2400" dirty="0"/>
+            </a:p>
+          </p:txBody>
+        </p:sp>
+      </p:grpSp>
+      <p:cxnSp>
+        <p:nvCxnSpPr>
+          <p:cNvPr id="18" name="ARROW_prototype_procedure"/>
+          <p:cNvCxnSpPr>
+            <a:stCxn id="10" idx="3"/>
+            <a:endCxn id="12" idx="1"/>
+          </p:cNvCxnSpPr>
+          <p:nvPr/>
+        </p:nvCxnSpPr>
+        <p:spPr>
+          <a:xfrm>
+            <a:off x="3017520" y="4274820"/>
+            <a:ext cx="1325880" cy="0"/>
+          </a:xfrm>
+          <a:prstGeom prst="line">
+            <a:avLst/>
+          </a:prstGeom>
+          <a:noFill/>
+          <a:ln w="31750">
             <a:solidFill>
               <a:srgbClr val="1D5EA7"/>
             </a:solidFill>
             <a:prstDash val="solid"/>
+            <a:tailEnd type="triangle"/>
           </a:ln>
         </p:spPr>
-      </p:sp>
-      <p:sp>
-        <p:nvSpPr>
-          <p:cNvPr id="15" name="line-164"/>
-          <p:cNvSpPr/>
-          <p:nvPr/>
-        </p:nvSpPr>
-        <p:spPr>
-          <a:xfrm>
-            <a:off x="6217920" y="4260342"/>
-            <a:ext cx="731520" cy="38100"/>
-          </a:xfrm>
-          <a:prstGeom prst="rect">
-            <a:avLst/>
-          </a:prstGeom>
-          <a:solidFill>
-            <a:srgbClr val="1D5EA7"/>
-          </a:solidFill>
-          <a:ln w="12700">
-            <a:solidFill>
-              <a:srgbClr val="1D5EA7">
-                <a:alpha val="0"/>
-              </a:srgbClr>
-            </a:solidFill>
-            <a:prstDash val="solid"/>
-          </a:ln>
-        </p:spPr>
-      </p:sp>
-      <p:sp>
-        <p:nvSpPr>
-          <p:cNvPr id="16" name="arrow-165"/>
-          <p:cNvSpPr/>
-          <p:nvPr/>
-        </p:nvSpPr>
-        <p:spPr>
-          <a:xfrm rot="5400000">
-            <a:off x="6880860" y="4210812"/>
-            <a:ext cx="137160" cy="137160"/>
-          </a:xfrm>
-          <a:prstGeom prst="triangle">
-            <a:avLst/>
-          </a:prstGeom>
-          <a:solidFill>
-            <a:srgbClr val="1D5EA7"/>
-          </a:solidFill>
-          <a:ln w="12700">
+      </p:cxnSp>
+      <p:cxnSp>
+        <p:nvCxnSpPr>
+          <p:cNvPr id="19" name="ARROW_procedure_evaluate"/>
+          <p:cNvCxnSpPr>
+            <a:stCxn id="12" idx="3"/>
+            <a:endCxn id="14" idx="1"/>
+          </p:cNvCxnSpPr>
+          <p:nvPr/>
+        </p:nvCxnSpPr>
+        <p:spPr>
+          <a:xfrm>
+            <a:off x="6766560" y="4274820"/>
+            <a:ext cx="1600200" cy="0"/>
+          </a:xfrm>
+          <a:prstGeom prst="line">
+            <a:avLst/>
+          </a:prstGeom>
+          <a:noFill/>
+          <a:ln w="31750">
             <a:solidFill>
               <a:srgbClr val="1D5EA7"/>
             </a:solidFill>
             <a:prstDash val="solid"/>
+            <a:tailEnd type="triangle"/>
           </a:ln>
         </p:spPr>
-      </p:sp>
-      <p:sp>
-        <p:nvSpPr>
-          <p:cNvPr id="17" name="line-166"/>
-          <p:cNvSpPr/>
-          <p:nvPr/>
-        </p:nvSpPr>
-        <p:spPr>
-          <a:xfrm>
-            <a:off x="9006840" y="4260342"/>
-            <a:ext cx="1371600" cy="38100"/>
-          </a:xfrm>
-          <a:prstGeom prst="rect">
-            <a:avLst/>
-          </a:prstGeom>
-          <a:solidFill>
-            <a:srgbClr val="1D5EA7"/>
-          </a:solidFill>
-          <a:ln w="12700">
-            <a:solidFill>
-              <a:srgbClr val="1D5EA7">
-                <a:alpha val="0"/>
-              </a:srgbClr>
-            </a:solidFill>
-            <a:prstDash val="solid"/>
-          </a:ln>
-        </p:spPr>
-      </p:sp>
-      <p:sp>
-        <p:nvSpPr>
-          <p:cNvPr id="18" name="line-167"/>
-          <p:cNvSpPr/>
-          <p:nvPr/>
-        </p:nvSpPr>
-        <p:spPr>
-          <a:xfrm>
-            <a:off x="10359390" y="4279392"/>
-            <a:ext cx="38100" cy="813816"/>
-          </a:xfrm>
-          <a:prstGeom prst="rect">
-            <a:avLst/>
-          </a:prstGeom>
-          <a:solidFill>
-            <a:srgbClr val="1D5EA7"/>
-          </a:solidFill>
-          <a:ln w="12700">
-            <a:solidFill>
-              <a:srgbClr val="1D5EA7">
-                <a:alpha val="0"/>
-              </a:srgbClr>
-            </a:solidFill>
-            <a:prstDash val="solid"/>
-          </a:ln>
-        </p:spPr>
-      </p:sp>
-      <p:sp>
-        <p:nvSpPr>
-          <p:cNvPr id="19" name="arrow-168"/>
-          <p:cNvSpPr/>
-          <p:nvPr/>
-        </p:nvSpPr>
-        <p:spPr>
-          <a:xfrm rot="10800000">
-            <a:off x="10309860" y="5024628"/>
-            <a:ext cx="137160" cy="137160"/>
-          </a:xfrm>
-          <a:prstGeom prst="triangle">
-            <a:avLst/>
-          </a:prstGeom>
-          <a:solidFill>
-            <a:srgbClr val="1D5EA7"/>
-          </a:solidFill>
-          <a:ln w="12700">
+      </p:cxnSp>
+      <p:cxnSp>
+        <p:nvCxnSpPr>
+          <p:cNvPr id="20" name="ARROW_evaluate_revise"/>
+          <p:cNvCxnSpPr>
+            <a:stCxn id="14" idx="2"/>
+            <a:endCxn id="16" idx="0"/>
+          </p:cNvCxnSpPr>
+          <p:nvPr/>
+        </p:nvCxnSpPr>
+        <p:spPr>
+          <a:xfrm>
+            <a:off x="9578340" y="4617720"/>
+            <a:ext cx="0" cy="548640"/>
+          </a:xfrm>
+          <a:prstGeom prst="line">
+            <a:avLst/>
+          </a:prstGeom>
+          <a:noFill/>
+          <a:ln w="31750">
             <a:solidFill>
               <a:srgbClr val="1D5EA7"/>
             </a:solidFill>
             <a:prstDash val="solid"/>
+            <a:tailEnd type="triangle"/>
           </a:ln>
         </p:spPr>
-      </p:sp>
-      <p:sp>
-        <p:nvSpPr>
-          <p:cNvPr id="20" name="line-169"/>
-          <p:cNvSpPr/>
-          <p:nvPr/>
-        </p:nvSpPr>
-        <p:spPr>
-          <a:xfrm>
-            <a:off x="1828800" y="5586222"/>
-            <a:ext cx="7589520" cy="38100"/>
-          </a:xfrm>
-          <a:prstGeom prst="rect">
-            <a:avLst/>
-          </a:prstGeom>
-          <a:solidFill>
-            <a:srgbClr val="1D5EA7"/>
-          </a:solidFill>
-          <a:ln w="12700">
-            <a:solidFill>
-              <a:srgbClr val="1D5EA7">
-                <a:alpha val="0"/>
-              </a:srgbClr>
-            </a:solidFill>
-            <a:prstDash val="solid"/>
-          </a:ln>
-        </p:spPr>
-      </p:sp>
-      <p:sp>
-        <p:nvSpPr>
-          <p:cNvPr id="21" name="line-170"/>
-          <p:cNvSpPr/>
-          <p:nvPr/>
-        </p:nvSpPr>
-        <p:spPr>
-          <a:xfrm>
-            <a:off x="1809750" y="4709160"/>
-            <a:ext cx="38100" cy="896112"/>
-          </a:xfrm>
-          <a:prstGeom prst="rect">
-            <a:avLst/>
-          </a:prstGeom>
-          <a:solidFill>
-            <a:srgbClr val="1D5EA7"/>
-          </a:solidFill>
-          <a:ln w="12700">
-            <a:solidFill>
-              <a:srgbClr val="1D5EA7">
-                <a:alpha val="0"/>
-              </a:srgbClr>
-            </a:solidFill>
-            <a:prstDash val="solid"/>
-          </a:ln>
-        </p:spPr>
-      </p:sp>
-      <p:sp>
-        <p:nvSpPr>
-          <p:cNvPr id="22" name="arrow-171"/>
-          <p:cNvSpPr/>
-          <p:nvPr/>
-        </p:nvSpPr>
-        <p:spPr>
-          <a:xfrm>
-            <a:off x="1760220" y="4640580"/>
-            <a:ext cx="137160" cy="137160"/>
-          </a:xfrm>
-          <a:prstGeom prst="triangle">
-            <a:avLst/>
-          </a:prstGeom>
-          <a:solidFill>
-            <a:srgbClr val="1D5EA7"/>
-          </a:solidFill>
-          <a:ln w="12700">
+      </p:cxnSp>
+      <p:cxnSp>
+        <p:nvCxnSpPr>
+          <p:cNvPr id="21" name="ARROW_revise_prototype"/>
+          <p:cNvCxnSpPr>
+            <a:stCxn id="16" idx="1"/>
+            <a:endCxn id="10" idx="2"/>
+          </p:cNvCxnSpPr>
+          <p:nvPr/>
+        </p:nvCxnSpPr>
+        <p:spPr>
+          <a:xfrm flipH="1" flipV="1">
+            <a:off x="2011680" y="4617720"/>
+            <a:ext cx="6355080" cy="891540"/>
+          </a:xfrm>
+          <a:prstGeom prst="line">
+            <a:avLst/>
+          </a:prstGeom>
+          <a:noFill/>
+          <a:ln w="31750">
             <a:solidFill>
               <a:srgbClr val="1D5EA7"/>
             </a:solidFill>
             <a:prstDash val="solid"/>
+            <a:tailEnd type="triangle"/>
           </a:ln>
         </p:spPr>
-      </p:sp>
-      <p:sp>
-        <p:nvSpPr>
-          <p:cNvPr id="23" name="text-172"/>
-          <p:cNvSpPr/>
-          <p:nvPr/>
-        </p:nvSpPr>
-        <p:spPr>
-          <a:xfrm>
-            <a:off x="4114800" y="5074920"/>
-            <a:ext cx="5029200" cy="457200"/>
-          </a:xfrm>
-          <a:prstGeom prst="rect">
-            <a:avLst/>
-          </a:prstGeom>
-          <a:noFill/>
-          <a:ln/>
-        </p:spPr>
-        <p:txBody>
-          <a:bodyPr wrap="square" lIns="0" tIns="0" rIns="0" bIns="0" rtlCol="0" anchor="ctr"/>
-          <a:lstStyle/>
-          <a:p>
-            <a:pPr indent="0" marL="0">
-              <a:buNone/>
-            </a:pPr>
-            <a:r>
-              <a:rPr lang="en-US" sz="2200" dirty="0">
-                <a:solidFill>
-                  <a:srgbClr val="52677B"/>
-                </a:solidFill>
-                <a:latin typeface="Noto Sans CJK JP" pitchFamily="34" charset="0"/>
-                <a:ea typeface="Noto Sans CJK JP" pitchFamily="34" charset="-122"/>
-                <a:cs typeface="Noto Sans CJK JP" pitchFamily="34" charset="-120"/>
-              </a:rPr>
-              <a:t>未実施の研究計画</a:t>
-            </a:r>
-            <a:endParaRPr lang="en-US" sz="2200" dirty="0"/>
-          </a:p>
-        </p:txBody>
-      </p:sp>
-      <p:sp>
-        <p:nvSpPr>
-          <p:cNvPr id="24" name="text-173"/>
+      </p:cxnSp>
+      <p:sp>
+        <p:nvSpPr>
+          <p:cNvPr id="22" name="text-159"/>
           <p:cNvSpPr/>
           <p:nvPr/>
         </p:nvSpPr>
@@ -8098,9 +8181,9 @@
                 <a:solidFill>
                   <a:srgbClr val="52677B"/>
                 </a:solidFill>
-                <a:latin typeface="Noto Sans CJK JP" pitchFamily="34" charset="0"/>
-                <a:ea typeface="Noto Sans CJK JP" pitchFamily="34" charset="-122"/>
-                <a:cs typeface="Noto Sans CJK JP" pitchFamily="34" charset="-120"/>
+                <a:latin typeface="BIZ UDPGothic" pitchFamily="34" charset="0"/>
+                <a:ea typeface="BIZ UDPGothic" pitchFamily="34" charset="-122"/>
+                <a:cs typeface="BIZ UDPGothic" pitchFamily="34" charset="-120"/>
               </a:rPr>
               <a:t>結果を先取りせず、迷いの原因を見つけて設計を更新する。</a:t>
             </a:r>
